--- a/ulesie_sebastien_2_presentation_092026.pptx
+++ b/ulesie_sebastien_2_presentation_092026.pptx
@@ -25,7 +25,7 @@
     <p:sldId id="376" r:id="rId13"/>
     <p:sldId id="377" r:id="rId14"/>
     <p:sldId id="378" r:id="rId15"/>
-    <p:sldId id="282" r:id="rId16"/>
+    <p:sldId id="379" r:id="rId16"/>
     <p:sldId id="299" r:id="rId17"/>
   </p:sldIdLst>
   <p:sldSz cx="12192000" cy="6858000"/>
@@ -2045,8 +2045,13 @@
         <a:p>
           <a:r>
             <a:rPr lang="fr-FR" dirty="0"/>
-            <a:t>4- Schéma d’architecture</a:t>
+            <a:t>4- Démonstration </a:t>
           </a:r>
+          <a:r>
+            <a:rPr lang="fr-FR" dirty="0" err="1"/>
+            <a:t>Kestra</a:t>
+          </a:r>
+          <a:endParaRPr lang="fr-FR" dirty="0"/>
         </a:p>
       </dgm:t>
     </dgm:pt>
@@ -2081,8 +2086,13 @@
         <a:p>
           <a:r>
             <a:rPr lang="fr-FR" dirty="0"/>
-            <a:t>3- Processus collecter, transformer, stocker et tester les données</a:t>
+            <a:t>3- Flow </a:t>
           </a:r>
+          <a:r>
+            <a:rPr lang="fr-FR" dirty="0" err="1"/>
+            <a:t>Kestra</a:t>
+          </a:r>
+          <a:endParaRPr lang="fr-FR" dirty="0"/>
         </a:p>
       </dgm:t>
     </dgm:pt>
@@ -2144,177 +2154,6 @@
         </a:p>
       </dgm:t>
     </dgm:pt>
-    <dgm:pt modelId="{10F4FD06-E452-44ED-A921-58727BCB960A}">
-      <dgm:prSet phldrT="[Texte]" phldr="0"/>
-      <dgm:spPr/>
-      <dgm:t>
-        <a:bodyPr/>
-        <a:lstStyle/>
-        <a:p>
-          <a:r>
-            <a:rPr lang="fr-FR" dirty="0"/>
-            <a:t>5- Mise en place </a:t>
-          </a:r>
-          <a:r>
-            <a:rPr lang="fr-FR" dirty="0" err="1"/>
-            <a:t>Airbyte</a:t>
-          </a:r>
-          <a:endParaRPr lang="fr-FR" dirty="0"/>
-        </a:p>
-      </dgm:t>
-    </dgm:pt>
-    <dgm:pt modelId="{B7E01A7A-0B52-49F1-9D84-3CDC11E7F5E7}" type="parTrans" cxnId="{8B050C56-35A9-489A-B54E-3E969E6E5C65}">
-      <dgm:prSet/>
-      <dgm:spPr/>
-      <dgm:t>
-        <a:bodyPr/>
-        <a:lstStyle/>
-        <a:p>
-          <a:endParaRPr lang="fr-FR"/>
-        </a:p>
-      </dgm:t>
-    </dgm:pt>
-    <dgm:pt modelId="{BF084CD2-773F-4397-B5DA-1C0C0BAF6D87}" type="sibTrans" cxnId="{8B050C56-35A9-489A-B54E-3E969E6E5C65}">
-      <dgm:prSet/>
-      <dgm:spPr/>
-      <dgm:t>
-        <a:bodyPr/>
-        <a:lstStyle/>
-        <a:p>
-          <a:endParaRPr lang="fr-FR"/>
-        </a:p>
-      </dgm:t>
-    </dgm:pt>
-    <dgm:pt modelId="{C5B30B90-4036-464E-A28E-383F3D5B746F}">
-      <dgm:prSet phldrT="[Texte]" phldr="0"/>
-      <dgm:spPr/>
-      <dgm:t>
-        <a:bodyPr/>
-        <a:lstStyle/>
-        <a:p>
-          <a:r>
-            <a:rPr lang="fr-FR" dirty="0"/>
-            <a:t>6- Mise en place DBT</a:t>
-          </a:r>
-        </a:p>
-      </dgm:t>
-    </dgm:pt>
-    <dgm:pt modelId="{1F871E0C-41C6-460A-8D72-F79549FEE94E}" type="parTrans" cxnId="{60AB59C1-93C6-4A83-820B-AF25EED12C2A}">
-      <dgm:prSet/>
-      <dgm:spPr/>
-      <dgm:t>
-        <a:bodyPr/>
-        <a:lstStyle/>
-        <a:p>
-          <a:endParaRPr lang="fr-FR"/>
-        </a:p>
-      </dgm:t>
-    </dgm:pt>
-    <dgm:pt modelId="{B8E65884-E0EE-41D7-9E11-32E3A03763CD}" type="sibTrans" cxnId="{60AB59C1-93C6-4A83-820B-AF25EED12C2A}">
-      <dgm:prSet/>
-      <dgm:spPr/>
-      <dgm:t>
-        <a:bodyPr/>
-        <a:lstStyle/>
-        <a:p>
-          <a:endParaRPr lang="fr-FR"/>
-        </a:p>
-      </dgm:t>
-    </dgm:pt>
-    <dgm:pt modelId="{7B991E51-EA9F-4EA3-999C-494E52148DFB}">
-      <dgm:prSet phldrT="[Texte]" phldr="0"/>
-      <dgm:spPr/>
-      <dgm:t>
-        <a:bodyPr/>
-        <a:lstStyle/>
-        <a:p>
-          <a:r>
-            <a:rPr lang="fr-FR" dirty="0"/>
-            <a:t>7- Temps accessibilité aux données</a:t>
-          </a:r>
-        </a:p>
-      </dgm:t>
-    </dgm:pt>
-    <dgm:pt modelId="{89EBD24B-A965-4033-A3A8-D26BBD8F9C55}" type="parTrans" cxnId="{ACBF787A-C137-4F23-B827-1003E2B82B44}">
-      <dgm:prSet/>
-      <dgm:spPr/>
-      <dgm:t>
-        <a:bodyPr/>
-        <a:lstStyle/>
-        <a:p>
-          <a:endParaRPr lang="fr-FR"/>
-        </a:p>
-      </dgm:t>
-    </dgm:pt>
-    <dgm:pt modelId="{51CD5044-32D5-4267-9452-9F02006ACD1D}" type="sibTrans" cxnId="{ACBF787A-C137-4F23-B827-1003E2B82B44}">
-      <dgm:prSet/>
-      <dgm:spPr/>
-      <dgm:t>
-        <a:bodyPr/>
-        <a:lstStyle/>
-        <a:p>
-          <a:endParaRPr lang="fr-FR"/>
-        </a:p>
-      </dgm:t>
-    </dgm:pt>
-    <dgm:pt modelId="{BB40B4F6-4EB6-4EBF-9E1B-B9D404846270}">
-      <dgm:prSet phldrT="[Texte]" phldr="0"/>
-      <dgm:spPr/>
-      <dgm:t>
-        <a:bodyPr/>
-        <a:lstStyle/>
-        <a:p>
-          <a:r>
-            <a:rPr lang="fr-FR" dirty="0"/>
-            <a:t>8- Qualité des données</a:t>
-          </a:r>
-        </a:p>
-      </dgm:t>
-    </dgm:pt>
-    <dgm:pt modelId="{907C754D-DDD4-4E71-AFE2-02BB244F0F38}" type="parTrans" cxnId="{8A736A9F-65F0-4A55-9A3F-CCF416234F97}">
-      <dgm:prSet/>
-      <dgm:spPr/>
-      <dgm:t>
-        <a:bodyPr/>
-        <a:lstStyle/>
-        <a:p>
-          <a:endParaRPr lang="fr-FR"/>
-        </a:p>
-      </dgm:t>
-    </dgm:pt>
-    <dgm:pt modelId="{FAB9DC6E-0691-4B3E-84B9-DFFF68013930}" type="sibTrans" cxnId="{8A736A9F-65F0-4A55-9A3F-CCF416234F97}">
-      <dgm:prSet/>
-      <dgm:spPr/>
-      <dgm:t>
-        <a:bodyPr/>
-        <a:lstStyle/>
-        <a:p>
-          <a:endParaRPr lang="fr-FR"/>
-        </a:p>
-      </dgm:t>
-    </dgm:pt>
-    <dgm:pt modelId="{3CD23260-9728-4408-BFD6-CE02FEDB8461}">
-      <dgm:prSet phldrT="[Texte]" phldr="0"/>
-      <dgm:spPr/>
-      <dgm:t>
-        <a:bodyPr/>
-        <a:lstStyle/>
-        <a:p>
-          <a:r>
-            <a:rPr lang="fr-FR" dirty="0"/>
-            <a:t>9- Mise en place AWS</a:t>
-          </a:r>
-        </a:p>
-      </dgm:t>
-    </dgm:pt>
-    <dgm:pt modelId="{B46BBC53-87DA-461B-A8AE-AC308B5637EE}" type="parTrans" cxnId="{DCFE94A2-0395-4927-9F3F-AF2253C34E08}">
-      <dgm:prSet/>
-      <dgm:spPr/>
-    </dgm:pt>
-    <dgm:pt modelId="{6DD7A032-6B21-43D6-BF72-FE2756121EE7}" type="sibTrans" cxnId="{DCFE94A2-0395-4927-9F3F-AF2253C34E08}">
-      <dgm:prSet/>
-      <dgm:spPr/>
-    </dgm:pt>
     <dgm:pt modelId="{BB89F849-78B2-43DF-933A-2353D297DD5D}" type="pres">
       <dgm:prSet presAssocID="{2A0612ED-5876-4919-BCC8-600F5B229E71}" presName="linear" presStyleCnt="0">
         <dgm:presLayoutVars>
@@ -2325,7 +2164,7 @@
       <dgm:spPr/>
     </dgm:pt>
     <dgm:pt modelId="{BB92269C-473B-4581-93AF-AD006B94C36C}" type="pres">
-      <dgm:prSet presAssocID="{ACF00B4C-E6D7-4CF7-AFA6-22ECB4A54A6A}" presName="parentText" presStyleLbl="node1" presStyleIdx="0" presStyleCnt="9">
+      <dgm:prSet presAssocID="{ACF00B4C-E6D7-4CF7-AFA6-22ECB4A54A6A}" presName="parentText" presStyleLbl="node1" presStyleIdx="0" presStyleCnt="4">
         <dgm:presLayoutVars>
           <dgm:chMax val="0"/>
           <dgm:bulletEnabled val="1"/>
@@ -2338,7 +2177,7 @@
       <dgm:spPr/>
     </dgm:pt>
     <dgm:pt modelId="{90650EEF-1F9D-463E-A867-D4AB9F2E38B6}" type="pres">
-      <dgm:prSet presAssocID="{137669DF-45F8-40AE-925B-B1ADA604DE22}" presName="parentText" presStyleLbl="node1" presStyleIdx="1" presStyleCnt="9">
+      <dgm:prSet presAssocID="{137669DF-45F8-40AE-925B-B1ADA604DE22}" presName="parentText" presStyleLbl="node1" presStyleIdx="1" presStyleCnt="4">
         <dgm:presLayoutVars>
           <dgm:chMax val="0"/>
           <dgm:bulletEnabled val="1"/>
@@ -2351,7 +2190,7 @@
       <dgm:spPr/>
     </dgm:pt>
     <dgm:pt modelId="{C0F2F60F-49A7-486C-BA84-7742A146D8C7}" type="pres">
-      <dgm:prSet presAssocID="{91C5EE06-7918-4F4E-ABC8-78B22D3546A2}" presName="parentText" presStyleLbl="node1" presStyleIdx="2" presStyleCnt="9">
+      <dgm:prSet presAssocID="{91C5EE06-7918-4F4E-ABC8-78B22D3546A2}" presName="parentText" presStyleLbl="node1" presStyleIdx="2" presStyleCnt="4">
         <dgm:presLayoutVars>
           <dgm:chMax val="0"/>
           <dgm:bulletEnabled val="1"/>
@@ -2364,72 +2203,7 @@
       <dgm:spPr/>
     </dgm:pt>
     <dgm:pt modelId="{188E501D-B60D-4714-8E70-1CD5D6D0CD0B}" type="pres">
-      <dgm:prSet presAssocID="{09562225-7FCE-4E93-8C05-403975C5475D}" presName="parentText" presStyleLbl="node1" presStyleIdx="3" presStyleCnt="9">
-        <dgm:presLayoutVars>
-          <dgm:chMax val="0"/>
-          <dgm:bulletEnabled val="1"/>
-        </dgm:presLayoutVars>
-      </dgm:prSet>
-      <dgm:spPr/>
-    </dgm:pt>
-    <dgm:pt modelId="{01202958-3686-43FE-B599-602B95F887BF}" type="pres">
-      <dgm:prSet presAssocID="{A16D4EFB-D346-4379-AC60-BC2431B43AE4}" presName="spacer" presStyleCnt="0"/>
-      <dgm:spPr/>
-    </dgm:pt>
-    <dgm:pt modelId="{DF10A574-F3D9-4FC2-A6EE-E7E8311CF638}" type="pres">
-      <dgm:prSet presAssocID="{10F4FD06-E452-44ED-A921-58727BCB960A}" presName="parentText" presStyleLbl="node1" presStyleIdx="4" presStyleCnt="9">
-        <dgm:presLayoutVars>
-          <dgm:chMax val="0"/>
-          <dgm:bulletEnabled val="1"/>
-        </dgm:presLayoutVars>
-      </dgm:prSet>
-      <dgm:spPr/>
-    </dgm:pt>
-    <dgm:pt modelId="{F15F21A4-6B6A-46CD-A116-A9F8B39033B5}" type="pres">
-      <dgm:prSet presAssocID="{BF084CD2-773F-4397-B5DA-1C0C0BAF6D87}" presName="spacer" presStyleCnt="0"/>
-      <dgm:spPr/>
-    </dgm:pt>
-    <dgm:pt modelId="{9F5EF941-1609-4E21-A343-705F89535533}" type="pres">
-      <dgm:prSet presAssocID="{C5B30B90-4036-464E-A28E-383F3D5B746F}" presName="parentText" presStyleLbl="node1" presStyleIdx="5" presStyleCnt="9">
-        <dgm:presLayoutVars>
-          <dgm:chMax val="0"/>
-          <dgm:bulletEnabled val="1"/>
-        </dgm:presLayoutVars>
-      </dgm:prSet>
-      <dgm:spPr/>
-    </dgm:pt>
-    <dgm:pt modelId="{4314F175-4D44-4C42-9CA6-E436348A0F9A}" type="pres">
-      <dgm:prSet presAssocID="{B8E65884-E0EE-41D7-9E11-32E3A03763CD}" presName="spacer" presStyleCnt="0"/>
-      <dgm:spPr/>
-    </dgm:pt>
-    <dgm:pt modelId="{F241338E-DAFB-437E-BAC6-556E992CF66B}" type="pres">
-      <dgm:prSet presAssocID="{7B991E51-EA9F-4EA3-999C-494E52148DFB}" presName="parentText" presStyleLbl="node1" presStyleIdx="6" presStyleCnt="9">
-        <dgm:presLayoutVars>
-          <dgm:chMax val="0"/>
-          <dgm:bulletEnabled val="1"/>
-        </dgm:presLayoutVars>
-      </dgm:prSet>
-      <dgm:spPr/>
-    </dgm:pt>
-    <dgm:pt modelId="{99D02E02-2418-40A3-B359-C1BC5D14D341}" type="pres">
-      <dgm:prSet presAssocID="{51CD5044-32D5-4267-9452-9F02006ACD1D}" presName="spacer" presStyleCnt="0"/>
-      <dgm:spPr/>
-    </dgm:pt>
-    <dgm:pt modelId="{1FDD8F32-99D9-4BBE-AF0A-DA191E5D1B76}" type="pres">
-      <dgm:prSet presAssocID="{BB40B4F6-4EB6-4EBF-9E1B-B9D404846270}" presName="parentText" presStyleLbl="node1" presStyleIdx="7" presStyleCnt="9">
-        <dgm:presLayoutVars>
-          <dgm:chMax val="0"/>
-          <dgm:bulletEnabled val="1"/>
-        </dgm:presLayoutVars>
-      </dgm:prSet>
-      <dgm:spPr/>
-    </dgm:pt>
-    <dgm:pt modelId="{22C40D4C-2771-429E-B890-4635503557F1}" type="pres">
-      <dgm:prSet presAssocID="{FAB9DC6E-0691-4B3E-84B9-DFFF68013930}" presName="spacer" presStyleCnt="0"/>
-      <dgm:spPr/>
-    </dgm:pt>
-    <dgm:pt modelId="{B65EB578-92C6-4AE5-8CB8-023DE47A0834}" type="pres">
-      <dgm:prSet presAssocID="{3CD23260-9728-4408-BFD6-CE02FEDB8461}" presName="parentText" presStyleLbl="node1" presStyleIdx="8" presStyleCnt="9">
+      <dgm:prSet presAssocID="{09562225-7FCE-4E93-8C05-403975C5475D}" presName="parentText" presStyleLbl="node1" presStyleIdx="3" presStyleCnt="4">
         <dgm:presLayoutVars>
           <dgm:chMax val="0"/>
           <dgm:bulletEnabled val="1"/>
@@ -2440,19 +2214,9 @@
   </dgm:ptLst>
   <dgm:cxnLst>
     <dgm:cxn modelId="{72D84625-8B4D-4B3B-B34F-C7465EF419B4}" type="presOf" srcId="{09562225-7FCE-4E93-8C05-403975C5475D}" destId="{188E501D-B60D-4714-8E70-1CD5D6D0CD0B}" srcOrd="0" destOrd="0" presId="urn:microsoft.com/office/officeart/2005/8/layout/vList2"/>
-    <dgm:cxn modelId="{CF650333-ECB8-4CAD-90C5-194AFE26462D}" type="presOf" srcId="{C5B30B90-4036-464E-A28E-383F3D5B746F}" destId="{9F5EF941-1609-4E21-A343-705F89535533}" srcOrd="0" destOrd="0" presId="urn:microsoft.com/office/officeart/2005/8/layout/vList2"/>
     <dgm:cxn modelId="{BA2CB65B-D598-4090-8A83-B9D804C83F04}" srcId="{2A0612ED-5876-4919-BCC8-600F5B229E71}" destId="{91C5EE06-7918-4F4E-ABC8-78B22D3546A2}" srcOrd="2" destOrd="0" parTransId="{F8E08B12-C3B4-44EB-8CAC-1ED61F0F2D2E}" sibTransId="{E6385450-D9A5-4D9C-B992-73589E40A9D7}"/>
-    <dgm:cxn modelId="{B440795D-9897-4394-885B-8552AAFE099C}" type="presOf" srcId="{BB40B4F6-4EB6-4EBF-9E1B-B9D404846270}" destId="{1FDD8F32-99D9-4BBE-AF0A-DA191E5D1B76}" srcOrd="0" destOrd="0" presId="urn:microsoft.com/office/officeart/2005/8/layout/vList2"/>
-    <dgm:cxn modelId="{8B050C56-35A9-489A-B54E-3E969E6E5C65}" srcId="{2A0612ED-5876-4919-BCC8-600F5B229E71}" destId="{10F4FD06-E452-44ED-A921-58727BCB960A}" srcOrd="4" destOrd="0" parTransId="{B7E01A7A-0B52-49F1-9D84-3CDC11E7F5E7}" sibTransId="{BF084CD2-773F-4397-B5DA-1C0C0BAF6D87}"/>
-    <dgm:cxn modelId="{22157357-0815-4091-B96F-71DED9F79FC1}" type="presOf" srcId="{7B991E51-EA9F-4EA3-999C-494E52148DFB}" destId="{F241338E-DAFB-437E-BAC6-556E992CF66B}" srcOrd="0" destOrd="0" presId="urn:microsoft.com/office/officeart/2005/8/layout/vList2"/>
     <dgm:cxn modelId="{BB8CFB59-ECE7-4CBC-9556-8A3CF9727DDA}" type="presOf" srcId="{ACF00B4C-E6D7-4CF7-AFA6-22ECB4A54A6A}" destId="{BB92269C-473B-4581-93AF-AD006B94C36C}" srcOrd="0" destOrd="0" presId="urn:microsoft.com/office/officeart/2005/8/layout/vList2"/>
-    <dgm:cxn modelId="{ACBF787A-C137-4F23-B827-1003E2B82B44}" srcId="{2A0612ED-5876-4919-BCC8-600F5B229E71}" destId="{7B991E51-EA9F-4EA3-999C-494E52148DFB}" srcOrd="6" destOrd="0" parTransId="{89EBD24B-A965-4033-A3A8-D26BBD8F9C55}" sibTransId="{51CD5044-32D5-4267-9452-9F02006ACD1D}"/>
-    <dgm:cxn modelId="{DB10A97E-ED05-4997-B914-A888129BEA2A}" type="presOf" srcId="{3CD23260-9728-4408-BFD6-CE02FEDB8461}" destId="{B65EB578-92C6-4AE5-8CB8-023DE47A0834}" srcOrd="0" destOrd="0" presId="urn:microsoft.com/office/officeart/2005/8/layout/vList2"/>
-    <dgm:cxn modelId="{8A736A9F-65F0-4A55-9A3F-CCF416234F97}" srcId="{2A0612ED-5876-4919-BCC8-600F5B229E71}" destId="{BB40B4F6-4EB6-4EBF-9E1B-B9D404846270}" srcOrd="7" destOrd="0" parTransId="{907C754D-DDD4-4E71-AFE2-02BB244F0F38}" sibTransId="{FAB9DC6E-0691-4B3E-84B9-DFFF68013930}"/>
-    <dgm:cxn modelId="{DCFE94A2-0395-4927-9F3F-AF2253C34E08}" srcId="{2A0612ED-5876-4919-BCC8-600F5B229E71}" destId="{3CD23260-9728-4408-BFD6-CE02FEDB8461}" srcOrd="8" destOrd="0" parTransId="{B46BBC53-87DA-461B-A8AE-AC308B5637EE}" sibTransId="{6DD7A032-6B21-43D6-BF72-FE2756121EE7}"/>
-    <dgm:cxn modelId="{9D92CEA4-472E-4B56-8712-594017CD6C24}" type="presOf" srcId="{10F4FD06-E452-44ED-A921-58727BCB960A}" destId="{DF10A574-F3D9-4FC2-A6EE-E7E8311CF638}" srcOrd="0" destOrd="0" presId="urn:microsoft.com/office/officeart/2005/8/layout/vList2"/>
     <dgm:cxn modelId="{1FA19BB3-7E11-45B8-93CE-4B2E16B76669}" type="presOf" srcId="{2A0612ED-5876-4919-BCC8-600F5B229E71}" destId="{BB89F849-78B2-43DF-933A-2353D297DD5D}" srcOrd="0" destOrd="0" presId="urn:microsoft.com/office/officeart/2005/8/layout/vList2"/>
-    <dgm:cxn modelId="{60AB59C1-93C6-4A83-820B-AF25EED12C2A}" srcId="{2A0612ED-5876-4919-BCC8-600F5B229E71}" destId="{C5B30B90-4036-464E-A28E-383F3D5B746F}" srcOrd="5" destOrd="0" parTransId="{1F871E0C-41C6-460A-8D72-F79549FEE94E}" sibTransId="{B8E65884-E0EE-41D7-9E11-32E3A03763CD}"/>
     <dgm:cxn modelId="{1AF982C7-C8EE-4870-AABC-FB5147AC9A32}" type="presOf" srcId="{137669DF-45F8-40AE-925B-B1ADA604DE22}" destId="{90650EEF-1F9D-463E-A867-D4AB9F2E38B6}" srcOrd="0" destOrd="0" presId="urn:microsoft.com/office/officeart/2005/8/layout/vList2"/>
     <dgm:cxn modelId="{9B4DC1D0-0933-42AD-B402-BAE36805541F}" srcId="{2A0612ED-5876-4919-BCC8-600F5B229E71}" destId="{ACF00B4C-E6D7-4CF7-AFA6-22ECB4A54A6A}" srcOrd="0" destOrd="0" parTransId="{FDD0A571-75BF-47A0-B20D-C0A8085AC3A7}" sibTransId="{F49AE16D-0DC3-4DA7-9732-CC9EE6A681A0}"/>
     <dgm:cxn modelId="{F64BF8E3-3C7F-43B9-85CA-B98717DDCE52}" srcId="{2A0612ED-5876-4919-BCC8-600F5B229E71}" destId="{09562225-7FCE-4E93-8C05-403975C5475D}" srcOrd="3" destOrd="0" parTransId="{0781F10D-ED0A-48FE-B536-0CE0EEFECEC3}" sibTransId="{A16D4EFB-D346-4379-AC60-BC2431B43AE4}"/>
@@ -2465,16 +2229,6 @@
     <dgm:cxn modelId="{42CC9DDE-BC30-4FD8-8FDD-4AFDD000929E}" type="presParOf" srcId="{BB89F849-78B2-43DF-933A-2353D297DD5D}" destId="{C0F2F60F-49A7-486C-BA84-7742A146D8C7}" srcOrd="4" destOrd="0" presId="urn:microsoft.com/office/officeart/2005/8/layout/vList2"/>
     <dgm:cxn modelId="{9BFAF73C-FF3F-4500-8FD0-55592E017415}" type="presParOf" srcId="{BB89F849-78B2-43DF-933A-2353D297DD5D}" destId="{0D1D8BE0-65D2-40B4-9127-53B188EBFA7A}" srcOrd="5" destOrd="0" presId="urn:microsoft.com/office/officeart/2005/8/layout/vList2"/>
     <dgm:cxn modelId="{722F17F9-025F-4A00-8C4F-4AD0DED9C8D9}" type="presParOf" srcId="{BB89F849-78B2-43DF-933A-2353D297DD5D}" destId="{188E501D-B60D-4714-8E70-1CD5D6D0CD0B}" srcOrd="6" destOrd="0" presId="urn:microsoft.com/office/officeart/2005/8/layout/vList2"/>
-    <dgm:cxn modelId="{7E3B1C48-B0EC-471B-84F4-F66A169FC015}" type="presParOf" srcId="{BB89F849-78B2-43DF-933A-2353D297DD5D}" destId="{01202958-3686-43FE-B599-602B95F887BF}" srcOrd="7" destOrd="0" presId="urn:microsoft.com/office/officeart/2005/8/layout/vList2"/>
-    <dgm:cxn modelId="{A86046FE-DA09-46BB-9435-870181EB0DD1}" type="presParOf" srcId="{BB89F849-78B2-43DF-933A-2353D297DD5D}" destId="{DF10A574-F3D9-4FC2-A6EE-E7E8311CF638}" srcOrd="8" destOrd="0" presId="urn:microsoft.com/office/officeart/2005/8/layout/vList2"/>
-    <dgm:cxn modelId="{F47D4C76-5BF7-4F2A-B8B6-B7FFF8D39703}" type="presParOf" srcId="{BB89F849-78B2-43DF-933A-2353D297DD5D}" destId="{F15F21A4-6B6A-46CD-A116-A9F8B39033B5}" srcOrd="9" destOrd="0" presId="urn:microsoft.com/office/officeart/2005/8/layout/vList2"/>
-    <dgm:cxn modelId="{4144A78D-BD0B-4E3C-8DC6-310FF6CA2D80}" type="presParOf" srcId="{BB89F849-78B2-43DF-933A-2353D297DD5D}" destId="{9F5EF941-1609-4E21-A343-705F89535533}" srcOrd="10" destOrd="0" presId="urn:microsoft.com/office/officeart/2005/8/layout/vList2"/>
-    <dgm:cxn modelId="{37A54790-8C4C-4815-83F9-6AA82C644739}" type="presParOf" srcId="{BB89F849-78B2-43DF-933A-2353D297DD5D}" destId="{4314F175-4D44-4C42-9CA6-E436348A0F9A}" srcOrd="11" destOrd="0" presId="urn:microsoft.com/office/officeart/2005/8/layout/vList2"/>
-    <dgm:cxn modelId="{83F96F77-1304-406F-B044-FDA6F253D8EA}" type="presParOf" srcId="{BB89F849-78B2-43DF-933A-2353D297DD5D}" destId="{F241338E-DAFB-437E-BAC6-556E992CF66B}" srcOrd="12" destOrd="0" presId="urn:microsoft.com/office/officeart/2005/8/layout/vList2"/>
-    <dgm:cxn modelId="{89070E65-CB06-46BC-8828-A6A194CFD53B}" type="presParOf" srcId="{BB89F849-78B2-43DF-933A-2353D297DD5D}" destId="{99D02E02-2418-40A3-B359-C1BC5D14D341}" srcOrd="13" destOrd="0" presId="urn:microsoft.com/office/officeart/2005/8/layout/vList2"/>
-    <dgm:cxn modelId="{0EA99179-2EB5-4B06-AD79-2011946C006C}" type="presParOf" srcId="{BB89F849-78B2-43DF-933A-2353D297DD5D}" destId="{1FDD8F32-99D9-4BBE-AF0A-DA191E5D1B76}" srcOrd="14" destOrd="0" presId="urn:microsoft.com/office/officeart/2005/8/layout/vList2"/>
-    <dgm:cxn modelId="{B71ADAED-8DAB-404E-877A-8A1551EA11C8}" type="presParOf" srcId="{BB89F849-78B2-43DF-933A-2353D297DD5D}" destId="{22C40D4C-2771-429E-B890-4635503557F1}" srcOrd="15" destOrd="0" presId="urn:microsoft.com/office/officeart/2005/8/layout/vList2"/>
-    <dgm:cxn modelId="{AB1E2936-FCDF-48A0-B231-6C06B89AF1E1}" type="presParOf" srcId="{BB89F849-78B2-43DF-933A-2353D297DD5D}" destId="{B65EB578-92C6-4AE5-8CB8-023DE47A0834}" srcOrd="16" destOrd="0" presId="urn:microsoft.com/office/officeart/2005/8/layout/vList2"/>
   </dgm:cxnLst>
   <dgm:bg/>
   <dgm:whole/>
@@ -2850,8 +2604,8 @@
       </dsp:nvSpPr>
       <dsp:spPr>
         <a:xfrm>
-          <a:off x="0" y="3676"/>
-          <a:ext cx="11348215" cy="479114"/>
+          <a:off x="0" y="4014"/>
+          <a:ext cx="11348215" cy="1095119"/>
         </a:xfrm>
         <a:prstGeom prst="roundRect">
           <a:avLst/>
@@ -2892,12 +2646,12 @@
         </a:fontRef>
       </dsp:style>
       <dsp:txBody>
-        <a:bodyPr spcFirstLastPara="0" vert="horz" wrap="square" lIns="80010" tIns="80010" rIns="80010" bIns="80010" numCol="1" spcCol="1270" anchor="ctr" anchorCtr="0">
+        <a:bodyPr spcFirstLastPara="0" vert="horz" wrap="square" lIns="182880" tIns="182880" rIns="182880" bIns="182880" numCol="1" spcCol="1270" anchor="ctr" anchorCtr="0">
           <a:noAutofit/>
         </a:bodyPr>
         <a:lstStyle/>
         <a:p>
-          <a:pPr marL="0" lvl="0" indent="0" algn="l" defTabSz="933450">
+          <a:pPr marL="0" lvl="0" indent="0" algn="l" defTabSz="2133600">
             <a:lnSpc>
               <a:spcPct val="90000"/>
             </a:lnSpc>
@@ -2910,14 +2664,14 @@
             <a:buNone/>
           </a:pPr>
           <a:r>
-            <a:rPr lang="fr-FR" sz="2100" kern="1200" dirty="0"/>
+            <a:rPr lang="fr-FR" sz="4800" kern="1200" dirty="0"/>
             <a:t>1- Contexte &amp; Objectif</a:t>
           </a:r>
         </a:p>
       </dsp:txBody>
       <dsp:txXfrm>
-        <a:off x="23388" y="27064"/>
-        <a:ext cx="11301439" cy="432338"/>
+        <a:off x="53459" y="57473"/>
+        <a:ext cx="11241297" cy="988201"/>
       </dsp:txXfrm>
     </dsp:sp>
     <dsp:sp modelId="{90650EEF-1F9D-463E-A867-D4AB9F2E38B6}">
@@ -2927,8 +2681,8 @@
       </dsp:nvSpPr>
       <dsp:spPr>
         <a:xfrm>
-          <a:off x="0" y="543271"/>
-          <a:ext cx="11348215" cy="479114"/>
+          <a:off x="0" y="1237374"/>
+          <a:ext cx="11348215" cy="1095119"/>
         </a:xfrm>
         <a:prstGeom prst="roundRect">
           <a:avLst/>
@@ -2969,12 +2723,12 @@
         </a:fontRef>
       </dsp:style>
       <dsp:txBody>
-        <a:bodyPr spcFirstLastPara="0" vert="horz" wrap="square" lIns="80010" tIns="80010" rIns="80010" bIns="80010" numCol="1" spcCol="1270" anchor="ctr" anchorCtr="0">
+        <a:bodyPr spcFirstLastPara="0" vert="horz" wrap="square" lIns="182880" tIns="182880" rIns="182880" bIns="182880" numCol="1" spcCol="1270" anchor="ctr" anchorCtr="0">
           <a:noAutofit/>
         </a:bodyPr>
         <a:lstStyle/>
         <a:p>
-          <a:pPr marL="0" lvl="0" indent="0" algn="l" defTabSz="933450">
+          <a:pPr marL="0" lvl="0" indent="0" algn="l" defTabSz="2133600">
             <a:lnSpc>
               <a:spcPct val="90000"/>
             </a:lnSpc>
@@ -2987,14 +2741,14 @@
             <a:buNone/>
           </a:pPr>
           <a:r>
-            <a:rPr lang="fr-FR" sz="2100" b="0" kern="1200" dirty="0"/>
+            <a:rPr lang="fr-FR" sz="4800" b="0" kern="1200" dirty="0"/>
             <a:t>2- Logigramme</a:t>
           </a:r>
         </a:p>
       </dsp:txBody>
       <dsp:txXfrm>
-        <a:off x="23388" y="566659"/>
-        <a:ext cx="11301439" cy="432338"/>
+        <a:off x="53459" y="1290833"/>
+        <a:ext cx="11241297" cy="988201"/>
       </dsp:txXfrm>
     </dsp:sp>
     <dsp:sp modelId="{C0F2F60F-49A7-486C-BA84-7742A146D8C7}">
@@ -3004,8 +2758,8 @@
       </dsp:nvSpPr>
       <dsp:spPr>
         <a:xfrm>
-          <a:off x="0" y="1082866"/>
-          <a:ext cx="11348215" cy="479114"/>
+          <a:off x="0" y="2470734"/>
+          <a:ext cx="11348215" cy="1095119"/>
         </a:xfrm>
         <a:prstGeom prst="roundRect">
           <a:avLst/>
@@ -3046,12 +2800,12 @@
         </a:fontRef>
       </dsp:style>
       <dsp:txBody>
-        <a:bodyPr spcFirstLastPara="0" vert="horz" wrap="square" lIns="80010" tIns="80010" rIns="80010" bIns="80010" numCol="1" spcCol="1270" anchor="ctr" anchorCtr="0">
+        <a:bodyPr spcFirstLastPara="0" vert="horz" wrap="square" lIns="182880" tIns="182880" rIns="182880" bIns="182880" numCol="1" spcCol="1270" anchor="ctr" anchorCtr="0">
           <a:noAutofit/>
         </a:bodyPr>
         <a:lstStyle/>
         <a:p>
-          <a:pPr marL="0" lvl="0" indent="0" algn="l" defTabSz="933450">
+          <a:pPr marL="0" lvl="0" indent="0" algn="l" defTabSz="2133600">
             <a:lnSpc>
               <a:spcPct val="90000"/>
             </a:lnSpc>
@@ -3064,14 +2818,19 @@
             <a:buNone/>
           </a:pPr>
           <a:r>
-            <a:rPr lang="fr-FR" sz="2100" kern="1200" dirty="0"/>
-            <a:t>3- Processus collecter, transformer, stocker et tester les données</a:t>
+            <a:rPr lang="fr-FR" sz="4800" kern="1200" dirty="0"/>
+            <a:t>3- Flow </a:t>
           </a:r>
+          <a:r>
+            <a:rPr lang="fr-FR" sz="4800" kern="1200" dirty="0" err="1"/>
+            <a:t>Kestra</a:t>
+          </a:r>
+          <a:endParaRPr lang="fr-FR" sz="4800" kern="1200" dirty="0"/>
         </a:p>
       </dsp:txBody>
       <dsp:txXfrm>
-        <a:off x="23388" y="1106254"/>
-        <a:ext cx="11301439" cy="432338"/>
+        <a:off x="53459" y="2524193"/>
+        <a:ext cx="11241297" cy="988201"/>
       </dsp:txXfrm>
     </dsp:sp>
     <dsp:sp modelId="{188E501D-B60D-4714-8E70-1CD5D6D0CD0B}">
@@ -3081,8 +2840,8 @@
       </dsp:nvSpPr>
       <dsp:spPr>
         <a:xfrm>
-          <a:off x="0" y="1622461"/>
-          <a:ext cx="11348215" cy="479114"/>
+          <a:off x="0" y="3704094"/>
+          <a:ext cx="11348215" cy="1095119"/>
         </a:xfrm>
         <a:prstGeom prst="roundRect">
           <a:avLst/>
@@ -3123,12 +2882,12 @@
         </a:fontRef>
       </dsp:style>
       <dsp:txBody>
-        <a:bodyPr spcFirstLastPara="0" vert="horz" wrap="square" lIns="80010" tIns="80010" rIns="80010" bIns="80010" numCol="1" spcCol="1270" anchor="ctr" anchorCtr="0">
+        <a:bodyPr spcFirstLastPara="0" vert="horz" wrap="square" lIns="182880" tIns="182880" rIns="182880" bIns="182880" numCol="1" spcCol="1270" anchor="ctr" anchorCtr="0">
           <a:noAutofit/>
         </a:bodyPr>
         <a:lstStyle/>
         <a:p>
-          <a:pPr marL="0" lvl="0" indent="0" algn="l" defTabSz="933450">
+          <a:pPr marL="0" lvl="0" indent="0" algn="l" defTabSz="2133600">
             <a:lnSpc>
               <a:spcPct val="90000"/>
             </a:lnSpc>
@@ -3141,404 +2900,19 @@
             <a:buNone/>
           </a:pPr>
           <a:r>
-            <a:rPr lang="fr-FR" sz="2100" kern="1200" dirty="0"/>
-            <a:t>4- Schéma d’architecture</a:t>
+            <a:rPr lang="fr-FR" sz="4800" kern="1200" dirty="0"/>
+            <a:t>4- Démonstration </a:t>
           </a:r>
+          <a:r>
+            <a:rPr lang="fr-FR" sz="4800" kern="1200" dirty="0" err="1"/>
+            <a:t>Kestra</a:t>
+          </a:r>
+          <a:endParaRPr lang="fr-FR" sz="4800" kern="1200" dirty="0"/>
         </a:p>
       </dsp:txBody>
       <dsp:txXfrm>
-        <a:off x="23388" y="1645849"/>
-        <a:ext cx="11301439" cy="432338"/>
-      </dsp:txXfrm>
-    </dsp:sp>
-    <dsp:sp modelId="{DF10A574-F3D9-4FC2-A6EE-E7E8311CF638}">
-      <dsp:nvSpPr>
-        <dsp:cNvPr id="0" name=""/>
-        <dsp:cNvSpPr/>
-      </dsp:nvSpPr>
-      <dsp:spPr>
-        <a:xfrm>
-          <a:off x="0" y="2162056"/>
-          <a:ext cx="11348215" cy="479114"/>
-        </a:xfrm>
-        <a:prstGeom prst="roundRect">
-          <a:avLst/>
-        </a:prstGeom>
-        <a:solidFill>
-          <a:schemeClr val="accent6">
-            <a:hueOff val="0"/>
-            <a:satOff val="0"/>
-            <a:lumOff val="0"/>
-            <a:alphaOff val="0"/>
-          </a:schemeClr>
-        </a:solidFill>
-        <a:ln w="22225" cap="rnd" cmpd="sng" algn="ctr">
-          <a:solidFill>
-            <a:schemeClr val="lt1">
-              <a:hueOff val="0"/>
-              <a:satOff val="0"/>
-              <a:lumOff val="0"/>
-              <a:alphaOff val="0"/>
-            </a:schemeClr>
-          </a:solidFill>
-          <a:prstDash val="solid"/>
-        </a:ln>
-        <a:effectLst/>
-      </dsp:spPr>
-      <dsp:style>
-        <a:lnRef idx="2">
-          <a:scrgbClr r="0" g="0" b="0"/>
-        </a:lnRef>
-        <a:fillRef idx="1">
-          <a:scrgbClr r="0" g="0" b="0"/>
-        </a:fillRef>
-        <a:effectRef idx="0">
-          <a:scrgbClr r="0" g="0" b="0"/>
-        </a:effectRef>
-        <a:fontRef idx="minor">
-          <a:schemeClr val="lt1"/>
-        </a:fontRef>
-      </dsp:style>
-      <dsp:txBody>
-        <a:bodyPr spcFirstLastPara="0" vert="horz" wrap="square" lIns="80010" tIns="80010" rIns="80010" bIns="80010" numCol="1" spcCol="1270" anchor="ctr" anchorCtr="0">
-          <a:noAutofit/>
-        </a:bodyPr>
-        <a:lstStyle/>
-        <a:p>
-          <a:pPr marL="0" lvl="0" indent="0" algn="l" defTabSz="933450">
-            <a:lnSpc>
-              <a:spcPct val="90000"/>
-            </a:lnSpc>
-            <a:spcBef>
-              <a:spcPct val="0"/>
-            </a:spcBef>
-            <a:spcAft>
-              <a:spcPct val="35000"/>
-            </a:spcAft>
-            <a:buNone/>
-          </a:pPr>
-          <a:r>
-            <a:rPr lang="fr-FR" sz="2100" kern="1200" dirty="0"/>
-            <a:t>5- Mise en place </a:t>
-          </a:r>
-          <a:r>
-            <a:rPr lang="fr-FR" sz="2100" kern="1200" dirty="0" err="1"/>
-            <a:t>Airbyte</a:t>
-          </a:r>
-          <a:endParaRPr lang="fr-FR" sz="2100" kern="1200" dirty="0"/>
-        </a:p>
-      </dsp:txBody>
-      <dsp:txXfrm>
-        <a:off x="23388" y="2185444"/>
-        <a:ext cx="11301439" cy="432338"/>
-      </dsp:txXfrm>
-    </dsp:sp>
-    <dsp:sp modelId="{9F5EF941-1609-4E21-A343-705F89535533}">
-      <dsp:nvSpPr>
-        <dsp:cNvPr id="0" name=""/>
-        <dsp:cNvSpPr/>
-      </dsp:nvSpPr>
-      <dsp:spPr>
-        <a:xfrm>
-          <a:off x="0" y="2701651"/>
-          <a:ext cx="11348215" cy="479114"/>
-        </a:xfrm>
-        <a:prstGeom prst="roundRect">
-          <a:avLst/>
-        </a:prstGeom>
-        <a:solidFill>
-          <a:schemeClr val="accent2">
-            <a:hueOff val="0"/>
-            <a:satOff val="0"/>
-            <a:lumOff val="0"/>
-            <a:alphaOff val="0"/>
-          </a:schemeClr>
-        </a:solidFill>
-        <a:ln w="22225" cap="rnd" cmpd="sng" algn="ctr">
-          <a:solidFill>
-            <a:schemeClr val="lt1">
-              <a:hueOff val="0"/>
-              <a:satOff val="0"/>
-              <a:lumOff val="0"/>
-              <a:alphaOff val="0"/>
-            </a:schemeClr>
-          </a:solidFill>
-          <a:prstDash val="solid"/>
-        </a:ln>
-        <a:effectLst/>
-      </dsp:spPr>
-      <dsp:style>
-        <a:lnRef idx="2">
-          <a:scrgbClr r="0" g="0" b="0"/>
-        </a:lnRef>
-        <a:fillRef idx="1">
-          <a:scrgbClr r="0" g="0" b="0"/>
-        </a:fillRef>
-        <a:effectRef idx="0">
-          <a:scrgbClr r="0" g="0" b="0"/>
-        </a:effectRef>
-        <a:fontRef idx="minor">
-          <a:schemeClr val="lt1"/>
-        </a:fontRef>
-      </dsp:style>
-      <dsp:txBody>
-        <a:bodyPr spcFirstLastPara="0" vert="horz" wrap="square" lIns="80010" tIns="80010" rIns="80010" bIns="80010" numCol="1" spcCol="1270" anchor="ctr" anchorCtr="0">
-          <a:noAutofit/>
-        </a:bodyPr>
-        <a:lstStyle/>
-        <a:p>
-          <a:pPr marL="0" lvl="0" indent="0" algn="l" defTabSz="933450">
-            <a:lnSpc>
-              <a:spcPct val="90000"/>
-            </a:lnSpc>
-            <a:spcBef>
-              <a:spcPct val="0"/>
-            </a:spcBef>
-            <a:spcAft>
-              <a:spcPct val="35000"/>
-            </a:spcAft>
-            <a:buNone/>
-          </a:pPr>
-          <a:r>
-            <a:rPr lang="fr-FR" sz="2100" kern="1200" dirty="0"/>
-            <a:t>6- Mise en place DBT</a:t>
-          </a:r>
-        </a:p>
-      </dsp:txBody>
-      <dsp:txXfrm>
-        <a:off x="23388" y="2725039"/>
-        <a:ext cx="11301439" cy="432338"/>
-      </dsp:txXfrm>
-    </dsp:sp>
-    <dsp:sp modelId="{F241338E-DAFB-437E-BAC6-556E992CF66B}">
-      <dsp:nvSpPr>
-        <dsp:cNvPr id="0" name=""/>
-        <dsp:cNvSpPr/>
-      </dsp:nvSpPr>
-      <dsp:spPr>
-        <a:xfrm>
-          <a:off x="0" y="3241246"/>
-          <a:ext cx="11348215" cy="479114"/>
-        </a:xfrm>
-        <a:prstGeom prst="roundRect">
-          <a:avLst/>
-        </a:prstGeom>
-        <a:solidFill>
-          <a:schemeClr val="accent3">
-            <a:hueOff val="0"/>
-            <a:satOff val="0"/>
-            <a:lumOff val="0"/>
-            <a:alphaOff val="0"/>
-          </a:schemeClr>
-        </a:solidFill>
-        <a:ln w="22225" cap="rnd" cmpd="sng" algn="ctr">
-          <a:solidFill>
-            <a:schemeClr val="lt1">
-              <a:hueOff val="0"/>
-              <a:satOff val="0"/>
-              <a:lumOff val="0"/>
-              <a:alphaOff val="0"/>
-            </a:schemeClr>
-          </a:solidFill>
-          <a:prstDash val="solid"/>
-        </a:ln>
-        <a:effectLst/>
-      </dsp:spPr>
-      <dsp:style>
-        <a:lnRef idx="2">
-          <a:scrgbClr r="0" g="0" b="0"/>
-        </a:lnRef>
-        <a:fillRef idx="1">
-          <a:scrgbClr r="0" g="0" b="0"/>
-        </a:fillRef>
-        <a:effectRef idx="0">
-          <a:scrgbClr r="0" g="0" b="0"/>
-        </a:effectRef>
-        <a:fontRef idx="minor">
-          <a:schemeClr val="lt1"/>
-        </a:fontRef>
-      </dsp:style>
-      <dsp:txBody>
-        <a:bodyPr spcFirstLastPara="0" vert="horz" wrap="square" lIns="80010" tIns="80010" rIns="80010" bIns="80010" numCol="1" spcCol="1270" anchor="ctr" anchorCtr="0">
-          <a:noAutofit/>
-        </a:bodyPr>
-        <a:lstStyle/>
-        <a:p>
-          <a:pPr marL="0" lvl="0" indent="0" algn="l" defTabSz="933450">
-            <a:lnSpc>
-              <a:spcPct val="90000"/>
-            </a:lnSpc>
-            <a:spcBef>
-              <a:spcPct val="0"/>
-            </a:spcBef>
-            <a:spcAft>
-              <a:spcPct val="35000"/>
-            </a:spcAft>
-            <a:buNone/>
-          </a:pPr>
-          <a:r>
-            <a:rPr lang="fr-FR" sz="2100" kern="1200" dirty="0"/>
-            <a:t>7- Temps accessibilité aux données</a:t>
-          </a:r>
-        </a:p>
-      </dsp:txBody>
-      <dsp:txXfrm>
-        <a:off x="23388" y="3264634"/>
-        <a:ext cx="11301439" cy="432338"/>
-      </dsp:txXfrm>
-    </dsp:sp>
-    <dsp:sp modelId="{1FDD8F32-99D9-4BBE-AF0A-DA191E5D1B76}">
-      <dsp:nvSpPr>
-        <dsp:cNvPr id="0" name=""/>
-        <dsp:cNvSpPr/>
-      </dsp:nvSpPr>
-      <dsp:spPr>
-        <a:xfrm>
-          <a:off x="0" y="3780841"/>
-          <a:ext cx="11348215" cy="479114"/>
-        </a:xfrm>
-        <a:prstGeom prst="roundRect">
-          <a:avLst/>
-        </a:prstGeom>
-        <a:solidFill>
-          <a:schemeClr val="accent4">
-            <a:hueOff val="0"/>
-            <a:satOff val="0"/>
-            <a:lumOff val="0"/>
-            <a:alphaOff val="0"/>
-          </a:schemeClr>
-        </a:solidFill>
-        <a:ln w="22225" cap="rnd" cmpd="sng" algn="ctr">
-          <a:solidFill>
-            <a:schemeClr val="lt1">
-              <a:hueOff val="0"/>
-              <a:satOff val="0"/>
-              <a:lumOff val="0"/>
-              <a:alphaOff val="0"/>
-            </a:schemeClr>
-          </a:solidFill>
-          <a:prstDash val="solid"/>
-        </a:ln>
-        <a:effectLst/>
-      </dsp:spPr>
-      <dsp:style>
-        <a:lnRef idx="2">
-          <a:scrgbClr r="0" g="0" b="0"/>
-        </a:lnRef>
-        <a:fillRef idx="1">
-          <a:scrgbClr r="0" g="0" b="0"/>
-        </a:fillRef>
-        <a:effectRef idx="0">
-          <a:scrgbClr r="0" g="0" b="0"/>
-        </a:effectRef>
-        <a:fontRef idx="minor">
-          <a:schemeClr val="lt1"/>
-        </a:fontRef>
-      </dsp:style>
-      <dsp:txBody>
-        <a:bodyPr spcFirstLastPara="0" vert="horz" wrap="square" lIns="80010" tIns="80010" rIns="80010" bIns="80010" numCol="1" spcCol="1270" anchor="ctr" anchorCtr="0">
-          <a:noAutofit/>
-        </a:bodyPr>
-        <a:lstStyle/>
-        <a:p>
-          <a:pPr marL="0" lvl="0" indent="0" algn="l" defTabSz="933450">
-            <a:lnSpc>
-              <a:spcPct val="90000"/>
-            </a:lnSpc>
-            <a:spcBef>
-              <a:spcPct val="0"/>
-            </a:spcBef>
-            <a:spcAft>
-              <a:spcPct val="35000"/>
-            </a:spcAft>
-            <a:buNone/>
-          </a:pPr>
-          <a:r>
-            <a:rPr lang="fr-FR" sz="2100" kern="1200" dirty="0"/>
-            <a:t>8- Qualité des données</a:t>
-          </a:r>
-        </a:p>
-      </dsp:txBody>
-      <dsp:txXfrm>
-        <a:off x="23388" y="3804229"/>
-        <a:ext cx="11301439" cy="432338"/>
-      </dsp:txXfrm>
-    </dsp:sp>
-    <dsp:sp modelId="{B65EB578-92C6-4AE5-8CB8-023DE47A0834}">
-      <dsp:nvSpPr>
-        <dsp:cNvPr id="0" name=""/>
-        <dsp:cNvSpPr/>
-      </dsp:nvSpPr>
-      <dsp:spPr>
-        <a:xfrm>
-          <a:off x="0" y="4320436"/>
-          <a:ext cx="11348215" cy="479114"/>
-        </a:xfrm>
-        <a:prstGeom prst="roundRect">
-          <a:avLst/>
-        </a:prstGeom>
-        <a:solidFill>
-          <a:schemeClr val="accent5">
-            <a:hueOff val="0"/>
-            <a:satOff val="0"/>
-            <a:lumOff val="0"/>
-            <a:alphaOff val="0"/>
-          </a:schemeClr>
-        </a:solidFill>
-        <a:ln w="22225" cap="rnd" cmpd="sng" algn="ctr">
-          <a:solidFill>
-            <a:schemeClr val="lt1">
-              <a:hueOff val="0"/>
-              <a:satOff val="0"/>
-              <a:lumOff val="0"/>
-              <a:alphaOff val="0"/>
-            </a:schemeClr>
-          </a:solidFill>
-          <a:prstDash val="solid"/>
-        </a:ln>
-        <a:effectLst/>
-      </dsp:spPr>
-      <dsp:style>
-        <a:lnRef idx="2">
-          <a:scrgbClr r="0" g="0" b="0"/>
-        </a:lnRef>
-        <a:fillRef idx="1">
-          <a:scrgbClr r="0" g="0" b="0"/>
-        </a:fillRef>
-        <a:effectRef idx="0">
-          <a:scrgbClr r="0" g="0" b="0"/>
-        </a:effectRef>
-        <a:fontRef idx="minor">
-          <a:schemeClr val="lt1"/>
-        </a:fontRef>
-      </dsp:style>
-      <dsp:txBody>
-        <a:bodyPr spcFirstLastPara="0" vert="horz" wrap="square" lIns="80010" tIns="80010" rIns="80010" bIns="80010" numCol="1" spcCol="1270" anchor="ctr" anchorCtr="0">
-          <a:noAutofit/>
-        </a:bodyPr>
-        <a:lstStyle/>
-        <a:p>
-          <a:pPr marL="0" lvl="0" indent="0" algn="l" defTabSz="933450">
-            <a:lnSpc>
-              <a:spcPct val="90000"/>
-            </a:lnSpc>
-            <a:spcBef>
-              <a:spcPct val="0"/>
-            </a:spcBef>
-            <a:spcAft>
-              <a:spcPct val="35000"/>
-            </a:spcAft>
-            <a:buNone/>
-          </a:pPr>
-          <a:r>
-            <a:rPr lang="fr-FR" sz="2100" kern="1200" dirty="0"/>
-            <a:t>9- Mise en place AWS</a:t>
-          </a:r>
-        </a:p>
-      </dsp:txBody>
-      <dsp:txXfrm>
-        <a:off x="23388" y="4343824"/>
-        <a:ext cx="11301439" cy="432338"/>
+        <a:off x="53459" y="3757553"/>
+        <a:ext cx="11241297" cy="988201"/>
       </dsp:txXfrm>
     </dsp:sp>
   </dsp:spTree>
@@ -6751,7 +6125,7 @@
             <a:pPr rtl="0"/>
             <a:fld id="{2FC74BDE-6627-49B6-90F1-0334E723F64C}" type="datetime1">
               <a:rPr lang="fr-FR" smtClean="0"/>
-              <a:t>28/09/2026</a:t>
+              <a:t>02/10/2026</a:t>
             </a:fld>
             <a:endParaRPr lang="en-US" dirty="0"/>
           </a:p>
@@ -6921,7 +6295,7 @@
             <a:pPr rtl="0"/>
             <a:fld id="{F28DAF60-E56A-4648-8936-22D801672B6C}" type="datetime1">
               <a:rPr lang="fr-FR" smtClean="0"/>
-              <a:t>28/09/2026</a:t>
+              <a:t>02/10/2026</a:t>
             </a:fld>
             <a:endParaRPr lang="en-US"/>
           </a:p>
@@ -7442,7 +6816,7 @@
             <a:pPr rtl="0"/>
             <a:fld id="{E641DF6C-ECED-4BD8-8025-73323DD5D35C}" type="datetime1">
               <a:rPr lang="fr-FR" smtClean="0"/>
-              <a:t>28/09/2026</a:t>
+              <a:t>02/10/2026</a:t>
             </a:fld>
             <a:endParaRPr lang="en-US" dirty="0"/>
           </a:p>
@@ -7649,7 +7023,7 @@
             <a:pPr rtl="0"/>
             <a:fld id="{1E5B03D9-FC89-4784-BD60-336471BA7724}" type="datetime1">
               <a:rPr lang="fr-FR" smtClean="0"/>
-              <a:t>28/09/2026</a:t>
+              <a:t>02/10/2026</a:t>
             </a:fld>
             <a:endParaRPr lang="en-US" dirty="0"/>
           </a:p>
@@ -8043,7 +7417,7 @@
             <a:pPr rtl="0"/>
             <a:fld id="{D0216CB3-B929-446C-876F-83C9B86D9FDE}" type="datetime1">
               <a:rPr lang="fr-FR" smtClean="0"/>
-              <a:t>28/09/2026</a:t>
+              <a:t>02/10/2026</a:t>
             </a:fld>
             <a:endParaRPr lang="en-US" dirty="0"/>
           </a:p>
@@ -8245,7 +7619,7 @@
             <a:pPr rtl="0"/>
             <a:fld id="{22897033-9A55-4DAC-991D-1FF1921C78B7}" type="datetime1">
               <a:rPr lang="fr-FR" smtClean="0"/>
-              <a:t>28/09/2026</a:t>
+              <a:t>02/10/2026</a:t>
             </a:fld>
             <a:endParaRPr lang="en-US" dirty="0"/>
           </a:p>
@@ -8568,7 +7942,7 @@
             <a:pPr rtl="0"/>
             <a:fld id="{A1255F31-5DB3-4925-BA87-822F5B17A2F1}" type="datetime1">
               <a:rPr lang="fr-FR" smtClean="0"/>
-              <a:t>28/09/2026</a:t>
+              <a:t>02/10/2026</a:t>
             </a:fld>
             <a:endParaRPr lang="en-US" dirty="0"/>
           </a:p>
@@ -8825,7 +8199,7 @@
             <a:pPr rtl="0"/>
             <a:fld id="{7E4EF44C-5F50-4A80-A957-57B3338337C0}" type="datetime1">
               <a:rPr lang="fr-FR" smtClean="0"/>
-              <a:t>28/09/2026</a:t>
+              <a:t>02/10/2026</a:t>
             </a:fld>
             <a:endParaRPr lang="en-US" dirty="0"/>
           </a:p>
@@ -9251,7 +8625,7 @@
             <a:pPr rtl="0"/>
             <a:fld id="{B2D0F46D-59FD-4484-924E-E79DD516B5ED}" type="datetime1">
               <a:rPr lang="fr-FR" smtClean="0"/>
-              <a:t>28/09/2026</a:t>
+              <a:t>02/10/2026</a:t>
             </a:fld>
             <a:endParaRPr lang="en-US" dirty="0"/>
           </a:p>
@@ -9378,7 +8752,7 @@
             <a:pPr rtl="0"/>
             <a:fld id="{0FAEC910-4AAA-42A1-A49C-7DDC64BC53C6}" type="datetime1">
               <a:rPr lang="fr-FR" smtClean="0"/>
-              <a:t>28/09/2026</a:t>
+              <a:t>02/10/2026</a:t>
             </a:fld>
             <a:endParaRPr lang="en-US" dirty="0"/>
           </a:p>
@@ -9476,7 +8850,7 @@
             <a:pPr rtl="0"/>
             <a:fld id="{ACEC98BE-FCE2-445F-8146-3A7F8CC3881D}" type="datetime1">
               <a:rPr lang="fr-FR" smtClean="0"/>
-              <a:t>28/09/2026</a:t>
+              <a:t>02/10/2026</a:t>
             </a:fld>
             <a:endParaRPr lang="en-US" dirty="0"/>
           </a:p>
@@ -9864,7 +9238,7 @@
             <a:pPr rtl="0"/>
             <a:fld id="{6D0953DD-A6BD-427D-B7A8-BDE378B2E678}" type="datetime1">
               <a:rPr lang="fr-FR" smtClean="0"/>
-              <a:t>28/09/2026</a:t>
+              <a:t>02/10/2026</a:t>
             </a:fld>
             <a:endParaRPr lang="en-US" dirty="0"/>
           </a:p>
@@ -10162,7 +9536,7 @@
             <a:pPr rtl="0"/>
             <a:fld id="{47E77B56-6788-4F40-A65E-12AFEB3AC095}" type="datetime1">
               <a:rPr lang="fr-FR" smtClean="0"/>
-              <a:t>28/09/2026</a:t>
+              <a:t>02/10/2026</a:t>
             </a:fld>
             <a:endParaRPr lang="en-US" dirty="0"/>
           </a:p>
@@ -10380,7 +9754,7 @@
             <a:pPr rtl="0"/>
             <a:fld id="{E69A0D1A-B1A6-4A33-B3AE-513EF3B4A7E7}" type="datetime1">
               <a:rPr lang="fr-FR" smtClean="0"/>
-              <a:t>28/09/2026</a:t>
+              <a:t>02/10/2026</a:t>
             </a:fld>
             <a:endParaRPr lang="en-US" dirty="0"/>
           </a:p>
@@ -11876,6 +11250,102 @@
           </a:ln>
         </p:spPr>
       </p:pic>
+      <p:sp>
+        <p:nvSpPr>
+          <p:cNvPr id="3" name="ZoneTexte 2">
+            <a:extLst>
+              <a:ext uri="{FF2B5EF4-FFF2-40B4-BE49-F238E27FC236}">
+                <a16:creationId xmlns:a16="http://schemas.microsoft.com/office/drawing/2014/main" id="{AFC78A68-23D7-0D0C-D9E9-46DB554DF23B}"/>
+              </a:ext>
+            </a:extLst>
+          </p:cNvPr>
+          <p:cNvSpPr txBox="1"/>
+          <p:nvPr/>
+        </p:nvSpPr>
+        <p:spPr>
+          <a:xfrm>
+            <a:off x="8859895" y="1643138"/>
+            <a:ext cx="3175000" cy="3970318"/>
+          </a:xfrm>
+          <a:prstGeom prst="rect">
+            <a:avLst/>
+          </a:prstGeom>
+          <a:noFill/>
+        </p:spPr>
+        <p:txBody>
+          <a:bodyPr wrap="square">
+            <a:spAutoFit/>
+          </a:bodyPr>
+          <a:lstStyle/>
+          <a:p>
+            <a:r>
+              <a:rPr lang="fr-FR" sz="1400" i="1" dirty="0"/>
+              <a:t>Boucle qui sert à:</a:t>
+            </a:r>
+          </a:p>
+          <a:p>
+            <a:endParaRPr lang="fr-FR" sz="1400" i="1" dirty="0"/>
+          </a:p>
+          <a:p>
+            <a:pPr marL="285750" indent="-285750">
+              <a:buFont typeface="Arial" panose="020B0604020202020204" pitchFamily="34" charset="0"/>
+              <a:buChar char="•"/>
+            </a:pPr>
+            <a:r>
+              <a:rPr lang="fr-FR" sz="1400" i="1" dirty="0"/>
+              <a:t>exécuter le script Python de nettoyage métier : suppression des prix nuls ou négatifs, des pièces jointes (images), ou avec un </a:t>
+            </a:r>
+            <a:r>
+              <a:rPr lang="fr-FR" sz="1400" i="1" dirty="0" err="1"/>
+              <a:t>sku</a:t>
+            </a:r>
+            <a:r>
+              <a:rPr lang="fr-FR" sz="1400" i="1" dirty="0"/>
+              <a:t> manquant (spécifique à la table web).</a:t>
+            </a:r>
+          </a:p>
+          <a:p>
+            <a:endParaRPr lang="fr-FR" sz="1400" i="1" dirty="0"/>
+          </a:p>
+          <a:p>
+            <a:pPr marL="285750" indent="-285750">
+              <a:buFont typeface="Arial" panose="020B0604020202020204" pitchFamily="34" charset="0"/>
+              <a:buChar char="•"/>
+            </a:pPr>
+            <a:r>
+              <a:rPr lang="fr-FR" sz="1400" i="1" dirty="0"/>
+              <a:t>lancer des tests </a:t>
+            </a:r>
+            <a:r>
+              <a:rPr lang="fr-FR" sz="1400" i="1" dirty="0" err="1"/>
+              <a:t>pytest</a:t>
+            </a:r>
+            <a:r>
+              <a:rPr lang="fr-FR" sz="1400" i="1" dirty="0"/>
+              <a:t> : absence de prix négatifs ou nuls, absence des pièces jointes et d’identifiant nul dans la table Web </a:t>
+            </a:r>
+          </a:p>
+          <a:p>
+            <a:endParaRPr lang="fr-FR" sz="1400" i="1" dirty="0"/>
+          </a:p>
+          <a:p>
+            <a:pPr marL="285750" indent="-285750">
+              <a:buFont typeface="Arial" panose="020B0604020202020204" pitchFamily="34" charset="0"/>
+              <a:buChar char="•"/>
+            </a:pPr>
+            <a:r>
+              <a:rPr lang="fr-FR" sz="1400" i="1" dirty="0"/>
+              <a:t>si les tests échouent, le flow est mis en pause.</a:t>
+            </a:r>
+          </a:p>
+          <a:p>
+            <a:endParaRPr lang="fr-FR" sz="1400" i="1" dirty="0"/>
+          </a:p>
+          <a:p>
+            <a:endParaRPr lang="fr-FR" sz="1400" i="1" dirty="0"/>
+          </a:p>
+        </p:txBody>
+      </p:sp>
     </p:spTree>
     <p:extLst>
       <p:ext uri="{BB962C8B-B14F-4D97-AF65-F5344CB8AC3E}">
@@ -12073,6 +11543,106 @@
           </a:ln>
         </p:spPr>
       </p:pic>
+      <p:sp>
+        <p:nvSpPr>
+          <p:cNvPr id="8" name="ZoneTexte 7">
+            <a:extLst>
+              <a:ext uri="{FF2B5EF4-FFF2-40B4-BE49-F238E27FC236}">
+                <a16:creationId xmlns:a16="http://schemas.microsoft.com/office/drawing/2014/main" id="{1E743C67-7AE1-DD49-C281-60060708C0F8}"/>
+              </a:ext>
+            </a:extLst>
+          </p:cNvPr>
+          <p:cNvSpPr txBox="1"/>
+          <p:nvPr/>
+        </p:nvSpPr>
+        <p:spPr>
+          <a:xfrm>
+            <a:off x="8859895" y="1643138"/>
+            <a:ext cx="3175000" cy="3539430"/>
+          </a:xfrm>
+          <a:prstGeom prst="rect">
+            <a:avLst/>
+          </a:prstGeom>
+          <a:noFill/>
+        </p:spPr>
+        <p:txBody>
+          <a:bodyPr wrap="square">
+            <a:spAutoFit/>
+          </a:bodyPr>
+          <a:lstStyle/>
+          <a:p>
+            <a:r>
+              <a:rPr lang="fr-FR" sz="1400" i="1" dirty="0"/>
+              <a:t>Boucle qui sert à:</a:t>
+            </a:r>
+          </a:p>
+          <a:p>
+            <a:endParaRPr lang="fr-FR" sz="1400" i="1" dirty="0"/>
+          </a:p>
+          <a:p>
+            <a:pPr marL="285750" indent="-285750">
+              <a:buFont typeface="Arial" panose="020B0604020202020204" pitchFamily="34" charset="0"/>
+              <a:buChar char="•"/>
+            </a:pPr>
+            <a:r>
+              <a:rPr lang="fr-FR" sz="1400" i="1" dirty="0"/>
+              <a:t>exécuter le script Python de fusion des tables: Les tables ERP et web sont jointes via la table de liaison (</a:t>
+            </a:r>
+            <a:r>
+              <a:rPr lang="fr-FR" sz="1400" i="1" dirty="0" err="1"/>
+              <a:t>web_erp_joined</a:t>
+            </a:r>
+            <a:r>
+              <a:rPr lang="fr-FR" sz="1400" i="1" dirty="0"/>
+              <a:t>), créant un jeu de données unifié produit/vente.</a:t>
+            </a:r>
+          </a:p>
+          <a:p>
+            <a:endParaRPr lang="fr-FR" sz="1400" i="1" dirty="0"/>
+          </a:p>
+          <a:p>
+            <a:pPr marL="285750" indent="-285750">
+              <a:buFont typeface="Arial" panose="020B0604020202020204" pitchFamily="34" charset="0"/>
+              <a:buChar char="•"/>
+            </a:pPr>
+            <a:r>
+              <a:rPr lang="fr-FR" sz="1400" i="1" dirty="0"/>
+              <a:t>lancer des tests </a:t>
+            </a:r>
+            <a:r>
+              <a:rPr lang="fr-FR" sz="1400" i="1" dirty="0" err="1"/>
+              <a:t>pytest</a:t>
+            </a:r>
+            <a:r>
+              <a:rPr lang="fr-FR" sz="1400" i="1" dirty="0"/>
+              <a:t> : nombre de lignes de la table web égale au nombre de lignes de la table fusion</a:t>
+            </a:r>
+          </a:p>
+          <a:p>
+            <a:pPr marL="285750" indent="-285750">
+              <a:buFontTx/>
+              <a:buChar char="-"/>
+            </a:pPr>
+            <a:endParaRPr lang="fr-FR" sz="1400" i="1" dirty="0"/>
+          </a:p>
+          <a:p>
+            <a:pPr marL="285750" indent="-285750">
+              <a:buFont typeface="Arial" panose="020B0604020202020204" pitchFamily="34" charset="0"/>
+              <a:buChar char="•"/>
+            </a:pPr>
+            <a:r>
+              <a:rPr lang="fr-FR" sz="1400" i="1" dirty="0"/>
+              <a:t>si les tests échouent, le flow est mis en pause.</a:t>
+            </a:r>
+          </a:p>
+          <a:p>
+            <a:endParaRPr lang="fr-FR" sz="1400" i="1" dirty="0"/>
+          </a:p>
+          <a:p>
+            <a:endParaRPr lang="fr-FR" sz="1400" i="1" dirty="0"/>
+          </a:p>
+        </p:txBody>
+      </p:sp>
     </p:spTree>
     <p:extLst>
       <p:ext uri="{BB962C8B-B14F-4D97-AF65-F5344CB8AC3E}">
@@ -12270,6 +11840,122 @@
           </a:ln>
         </p:spPr>
       </p:pic>
+      <p:sp>
+        <p:nvSpPr>
+          <p:cNvPr id="3" name="ZoneTexte 2">
+            <a:extLst>
+              <a:ext uri="{FF2B5EF4-FFF2-40B4-BE49-F238E27FC236}">
+                <a16:creationId xmlns:a16="http://schemas.microsoft.com/office/drawing/2014/main" id="{11511740-2162-45AA-32ED-300D44F113E1}"/>
+              </a:ext>
+            </a:extLst>
+          </p:cNvPr>
+          <p:cNvSpPr txBox="1"/>
+          <p:nvPr/>
+        </p:nvSpPr>
+        <p:spPr>
+          <a:xfrm>
+            <a:off x="8859895" y="1643138"/>
+            <a:ext cx="3175000" cy="3539430"/>
+          </a:xfrm>
+          <a:prstGeom prst="rect">
+            <a:avLst/>
+          </a:prstGeom>
+          <a:noFill/>
+        </p:spPr>
+        <p:txBody>
+          <a:bodyPr wrap="square">
+            <a:spAutoFit/>
+          </a:bodyPr>
+          <a:lstStyle/>
+          <a:p>
+            <a:r>
+              <a:rPr lang="fr-FR" sz="1400" i="1" dirty="0"/>
+              <a:t>Boucle qui sert à:</a:t>
+            </a:r>
+          </a:p>
+          <a:p>
+            <a:endParaRPr lang="fr-FR" sz="1400" i="1" dirty="0"/>
+          </a:p>
+          <a:p>
+            <a:pPr marL="285750" indent="-285750">
+              <a:buFont typeface="Arial" panose="020B0604020202020204" pitchFamily="34" charset="0"/>
+              <a:buChar char="•"/>
+            </a:pPr>
+            <a:r>
+              <a:rPr lang="fr-FR" sz="1400" i="1" dirty="0"/>
+              <a:t>Exécuter le script Python de calcul du CA: Une table </a:t>
+            </a:r>
+            <a:r>
+              <a:rPr lang="fr-FR" sz="1400" i="1" dirty="0" err="1"/>
+              <a:t>revenus_web</a:t>
+            </a:r>
+            <a:r>
+              <a:rPr lang="fr-FR" sz="1400" i="1" dirty="0"/>
+              <a:t> calcule le CA par produit (</a:t>
+            </a:r>
+            <a:r>
+              <a:rPr lang="fr-FR" sz="1400" i="1" dirty="0" err="1"/>
+              <a:t>price</a:t>
+            </a:r>
+            <a:r>
+              <a:rPr lang="fr-FR" sz="1400" i="1" dirty="0"/>
+              <a:t> × </a:t>
+            </a:r>
+            <a:r>
+              <a:rPr lang="fr-FR" sz="1400" i="1" dirty="0" err="1"/>
+              <a:t>total_sales</a:t>
+            </a:r>
+            <a:r>
+              <a:rPr lang="fr-FR" sz="1400" i="1" dirty="0"/>
+              <a:t>) et le CA global est calculé par agrégation.</a:t>
+            </a:r>
+          </a:p>
+          <a:p>
+            <a:endParaRPr lang="fr-FR" sz="1400" i="1" dirty="0"/>
+          </a:p>
+          <a:p>
+            <a:pPr marL="285750" indent="-285750">
+              <a:buFont typeface="Arial" panose="020B0604020202020204" pitchFamily="34" charset="0"/>
+              <a:buChar char="•"/>
+            </a:pPr>
+            <a:r>
+              <a:rPr lang="fr-FR" sz="1400" i="1" dirty="0"/>
+              <a:t>lancer des tests </a:t>
+            </a:r>
+            <a:r>
+              <a:rPr lang="fr-FR" sz="1400" i="1" dirty="0" err="1"/>
+              <a:t>pytest</a:t>
+            </a:r>
+            <a:r>
+              <a:rPr lang="fr-FR" sz="1400" i="1" dirty="0"/>
+              <a:t> : somme du CA de chaque produit égale au CA global</a:t>
+            </a:r>
+          </a:p>
+          <a:p>
+            <a:pPr marL="285750" indent="-285750">
+              <a:buFontTx/>
+              <a:buChar char="-"/>
+            </a:pPr>
+            <a:endParaRPr lang="fr-FR" sz="1400" i="1" dirty="0"/>
+          </a:p>
+          <a:p>
+            <a:pPr marL="285750" indent="-285750">
+              <a:buFont typeface="Arial" panose="020B0604020202020204" pitchFamily="34" charset="0"/>
+              <a:buChar char="•"/>
+            </a:pPr>
+            <a:r>
+              <a:rPr lang="fr-FR" sz="1400" i="1" dirty="0"/>
+              <a:t>si les tests échouent, le flow est mis en pause.</a:t>
+            </a:r>
+          </a:p>
+          <a:p>
+            <a:endParaRPr lang="fr-FR" sz="1400" i="1" dirty="0"/>
+          </a:p>
+          <a:p>
+            <a:endParaRPr lang="fr-FR" sz="1400" i="1" dirty="0"/>
+          </a:p>
+        </p:txBody>
+      </p:sp>
     </p:spTree>
     <p:extLst>
       <p:ext uri="{BB962C8B-B14F-4D97-AF65-F5344CB8AC3E}">
@@ -12467,6 +12153,154 @@
           </a:ln>
         </p:spPr>
       </p:pic>
+      <p:sp>
+        <p:nvSpPr>
+          <p:cNvPr id="3" name="ZoneTexte 2">
+            <a:extLst>
+              <a:ext uri="{FF2B5EF4-FFF2-40B4-BE49-F238E27FC236}">
+                <a16:creationId xmlns:a16="http://schemas.microsoft.com/office/drawing/2014/main" id="{57A4E74C-3999-34EF-AAFA-AC36E8626C77}"/>
+              </a:ext>
+            </a:extLst>
+          </p:cNvPr>
+          <p:cNvSpPr txBox="1"/>
+          <p:nvPr/>
+        </p:nvSpPr>
+        <p:spPr>
+          <a:xfrm>
+            <a:off x="8859895" y="1643138"/>
+            <a:ext cx="3175000" cy="4832092"/>
+          </a:xfrm>
+          <a:prstGeom prst="rect">
+            <a:avLst/>
+          </a:prstGeom>
+          <a:noFill/>
+        </p:spPr>
+        <p:txBody>
+          <a:bodyPr wrap="square">
+            <a:spAutoFit/>
+          </a:bodyPr>
+          <a:lstStyle/>
+          <a:p>
+            <a:r>
+              <a:rPr lang="fr-FR" sz="1400" i="1" dirty="0"/>
+              <a:t>Deux approches parallèles génèrent des fichiers Excel : l'une via l'extension </a:t>
+            </a:r>
+            <a:r>
+              <a:rPr lang="fr-FR" sz="1400" i="1" dirty="0" err="1"/>
+              <a:t>DuckDB</a:t>
+            </a:r>
+            <a:r>
+              <a:rPr lang="fr-FR" sz="1400" i="1" dirty="0"/>
+              <a:t> </a:t>
+            </a:r>
+            <a:r>
+              <a:rPr lang="fr-FR" sz="1400" i="1" dirty="0" err="1"/>
+              <a:t>excel</a:t>
+            </a:r>
+            <a:r>
+              <a:rPr lang="fr-FR" sz="1400" i="1" dirty="0"/>
+              <a:t> (COPY TO), l'autre via pandas/</a:t>
+            </a:r>
+            <a:r>
+              <a:rPr lang="fr-FR" sz="1400" i="1" dirty="0" err="1"/>
+              <a:t>openpyxl</a:t>
+            </a:r>
+            <a:r>
+              <a:rPr lang="fr-FR" sz="1400" i="1" dirty="0"/>
+              <a:t> pour produire un classeur avec deux feuilles (</a:t>
+            </a:r>
+            <a:r>
+              <a:rPr lang="fr-FR" sz="1400" i="1" dirty="0" err="1"/>
+              <a:t>CA_products</a:t>
+            </a:r>
+            <a:r>
+              <a:rPr lang="fr-FR" sz="1400" i="1" dirty="0"/>
+              <a:t> et </a:t>
+            </a:r>
+            <a:r>
+              <a:rPr lang="fr-FR" sz="1400" i="1" dirty="0" err="1"/>
+              <a:t>CA_global</a:t>
+            </a:r>
+            <a:r>
+              <a:rPr lang="fr-FR" sz="1400" i="1" dirty="0"/>
+              <a:t>)</a:t>
+            </a:r>
+          </a:p>
+          <a:p>
+            <a:endParaRPr lang="fr-FR" sz="1400" i="1" dirty="0"/>
+          </a:p>
+          <a:p>
+            <a:endParaRPr lang="fr-FR" sz="1400" i="1" dirty="0"/>
+          </a:p>
+          <a:p>
+            <a:r>
+              <a:rPr lang="fr-FR" sz="1400" i="1" dirty="0"/>
+              <a:t>Boucle qui sert à:</a:t>
+            </a:r>
+          </a:p>
+          <a:p>
+            <a:endParaRPr lang="fr-FR" sz="1400" i="1" dirty="0"/>
+          </a:p>
+          <a:p>
+            <a:pPr marL="285750" indent="-285750">
+              <a:buFont typeface="Arial" panose="020B0604020202020204" pitchFamily="34" charset="0"/>
+              <a:buChar char="•"/>
+            </a:pPr>
+            <a:r>
+              <a:rPr lang="fr-FR" sz="1400" i="1" dirty="0"/>
+              <a:t>Exécuter le script Python z-score : Un score z est calculé sur le prix pour classer les produits comme "premium" ou non. </a:t>
+            </a:r>
+          </a:p>
+          <a:p>
+            <a:pPr marL="285750" indent="-285750">
+              <a:buFont typeface="Arial" panose="020B0604020202020204" pitchFamily="34" charset="0"/>
+              <a:buChar char="•"/>
+            </a:pPr>
+            <a:endParaRPr lang="fr-FR" sz="1400" i="1" dirty="0"/>
+          </a:p>
+          <a:p>
+            <a:pPr marL="285750" indent="-285750">
+              <a:buFont typeface="Arial" panose="020B0604020202020204" pitchFamily="34" charset="0"/>
+              <a:buChar char="•"/>
+            </a:pPr>
+            <a:r>
+              <a:rPr lang="fr-FR" sz="1400" i="1" dirty="0"/>
+              <a:t>lancer des tests </a:t>
+            </a:r>
+            <a:r>
+              <a:rPr lang="fr-FR" sz="1400" i="1" dirty="0" err="1"/>
+              <a:t>pytest</a:t>
+            </a:r>
+            <a:r>
+              <a:rPr lang="fr-FR" sz="1400" i="1" dirty="0"/>
+              <a:t> : cohérence du z-score (&gt;2) et la catégorie</a:t>
+            </a:r>
+          </a:p>
+          <a:p>
+            <a:pPr marL="285750" indent="-285750">
+              <a:buFontTx/>
+              <a:buChar char="-"/>
+            </a:pPr>
+            <a:endParaRPr lang="fr-FR" sz="1400" i="1" dirty="0"/>
+          </a:p>
+          <a:p>
+            <a:pPr marL="285750" indent="-285750">
+              <a:buFont typeface="Arial" panose="020B0604020202020204" pitchFamily="34" charset="0"/>
+              <a:buChar char="•"/>
+            </a:pPr>
+            <a:r>
+              <a:rPr lang="fr-FR" sz="1400" i="1" dirty="0"/>
+              <a:t>si les tests échouent, le flow est mis en pause.</a:t>
+            </a:r>
+          </a:p>
+          <a:p>
+            <a:endParaRPr lang="fr-FR" sz="1400" i="1" dirty="0"/>
+          </a:p>
+          <a:p>
+            <a:endParaRPr lang="fr-FR" sz="1400" i="1" dirty="0"/>
+          </a:p>
+        </p:txBody>
+      </p:sp>
     </p:spTree>
     <p:extLst>
       <p:ext uri="{BB962C8B-B14F-4D97-AF65-F5344CB8AC3E}">
@@ -12665,6 +12499,62 @@
           </a:ln>
         </p:spPr>
       </p:pic>
+      <p:sp>
+        <p:nvSpPr>
+          <p:cNvPr id="4" name="ZoneTexte 3">
+            <a:extLst>
+              <a:ext uri="{FF2B5EF4-FFF2-40B4-BE49-F238E27FC236}">
+                <a16:creationId xmlns:a16="http://schemas.microsoft.com/office/drawing/2014/main" id="{A9957C58-D7A6-5A9C-681B-DCFC78DA5777}"/>
+              </a:ext>
+            </a:extLst>
+          </p:cNvPr>
+          <p:cNvSpPr txBox="1"/>
+          <p:nvPr/>
+        </p:nvSpPr>
+        <p:spPr>
+          <a:xfrm>
+            <a:off x="9186334" y="2740394"/>
+            <a:ext cx="2819400" cy="1384995"/>
+          </a:xfrm>
+          <a:prstGeom prst="rect">
+            <a:avLst/>
+          </a:prstGeom>
+          <a:noFill/>
+        </p:spPr>
+        <p:txBody>
+          <a:bodyPr wrap="square">
+            <a:spAutoFit/>
+          </a:bodyPr>
+          <a:lstStyle/>
+          <a:p>
+            <a:pPr marL="285750" indent="-285750">
+              <a:buFont typeface="Arial" panose="020B0604020202020204" pitchFamily="34" charset="0"/>
+              <a:buChar char="•"/>
+            </a:pPr>
+            <a:r>
+              <a:rPr lang="fr-FR" sz="1400" i="1" dirty="0"/>
+              <a:t>Le flow exporte enfin deux fichiers CSV séparés : les vins premium et les vins ordinaires.</a:t>
+            </a:r>
+          </a:p>
+          <a:p>
+            <a:pPr marL="285750" indent="-285750">
+              <a:buFont typeface="Arial" panose="020B0604020202020204" pitchFamily="34" charset="0"/>
+              <a:buChar char="•"/>
+            </a:pPr>
+            <a:endParaRPr lang="fr-FR" sz="1400" i="1" dirty="0"/>
+          </a:p>
+          <a:p>
+            <a:pPr marL="285750" indent="-285750">
+              <a:buFont typeface="Arial" panose="020B0604020202020204" pitchFamily="34" charset="0"/>
+              <a:buChar char="•"/>
+            </a:pPr>
+            <a:r>
+              <a:rPr lang="fr-FR" sz="1400" i="1" dirty="0"/>
+              <a:t>deux tâches indépendantes exécutées en parallèle</a:t>
+            </a:r>
+          </a:p>
+        </p:txBody>
+      </p:sp>
     </p:spTree>
     <p:extLst>
       <p:ext uri="{BB962C8B-B14F-4D97-AF65-F5344CB8AC3E}">
@@ -12695,47 +12585,12 @@
           <a:chExt cx="0" cy="0"/>
         </a:xfrm>
       </p:grpSpPr>
-      <p:pic>
-        <p:nvPicPr>
-          <p:cNvPr id="2" name="Image 1" descr="Zoom sur un logo&#10;&#10;Description générée automatiquement">
+      <p:sp>
+        <p:nvSpPr>
+          <p:cNvPr id="2" name="Titre 1">
             <a:extLst>
               <a:ext uri="{FF2B5EF4-FFF2-40B4-BE49-F238E27FC236}">
-                <a16:creationId xmlns:a16="http://schemas.microsoft.com/office/drawing/2014/main" id="{04583C04-0D49-893D-0970-03D464B2622E}"/>
-              </a:ext>
-            </a:extLst>
-          </p:cNvPr>
-          <p:cNvPicPr>
-            <a:picLocks noChangeAspect="1"/>
-          </p:cNvPicPr>
-          <p:nvPr/>
-        </p:nvPicPr>
-        <p:blipFill rotWithShape="1">
-          <a:blip r:embed="rId2" cstate="hqprint">
-            <a:extLst>
-              <a:ext uri="{28A0092B-C50C-407E-A947-70E740481C1C}">
-                <a14:useLocalDpi xmlns:a14="http://schemas.microsoft.com/office/drawing/2010/main" val="0"/>
-              </a:ext>
-            </a:extLst>
-          </a:blip>
-          <a:srcRect/>
-          <a:stretch/>
-        </p:blipFill>
-        <p:spPr>
-          <a:xfrm>
-            <a:off x="6228083" y="551281"/>
-            <a:ext cx="5501641" cy="2676907"/>
-          </a:xfrm>
-          <a:prstGeom prst="rect">
-            <a:avLst/>
-          </a:prstGeom>
-        </p:spPr>
-      </p:pic>
-      <p:sp>
-        <p:nvSpPr>
-          <p:cNvPr id="8" name="Titre 7">
-            <a:extLst>
-              <a:ext uri="{FF2B5EF4-FFF2-40B4-BE49-F238E27FC236}">
-                <a16:creationId xmlns:a16="http://schemas.microsoft.com/office/drawing/2014/main" id="{FF07263C-067E-9E13-03BB-5E6100C18FC4}"/>
+                <a16:creationId xmlns:a16="http://schemas.microsoft.com/office/drawing/2014/main" id="{0DA461C0-5A93-6ECB-AAE3-E47E29BBBB71}"/>
               </a:ext>
             </a:extLst>
           </p:cNvPr>
@@ -12753,272 +12608,58 @@
           <a:p>
             <a:r>
               <a:rPr lang="fr-FR" dirty="0"/>
-              <a:t>Conclusion</a:t>
-            </a:r>
+              <a:t>4. Démonstration </a:t>
+            </a:r>
+            <a:r>
+              <a:rPr lang="fr-FR" dirty="0" err="1"/>
+              <a:t>Kestra</a:t>
+            </a:r>
+            <a:endParaRPr lang="fr-FR" dirty="0"/>
           </a:p>
         </p:txBody>
       </p:sp>
-      <p:sp>
-        <p:nvSpPr>
-          <p:cNvPr id="9" name="Espace réservé du contenu 8">
+      <p:pic>
+        <p:nvPicPr>
+          <p:cNvPr id="6" name="Espace réservé du contenu 5">
+            <a:hlinkClick r:id="rId2"/>
             <a:extLst>
               <a:ext uri="{FF2B5EF4-FFF2-40B4-BE49-F238E27FC236}">
-                <a16:creationId xmlns:a16="http://schemas.microsoft.com/office/drawing/2014/main" id="{561DFB75-921A-D949-3E0B-E858BC02A288}"/>
+                <a16:creationId xmlns:a16="http://schemas.microsoft.com/office/drawing/2014/main" id="{53C7123F-579D-11FE-C3D5-DEFC7C1D30F0}"/>
               </a:ext>
             </a:extLst>
           </p:cNvPr>
-          <p:cNvSpPr>
-            <a:spLocks noGrp="1"/>
-          </p:cNvSpPr>
+          <p:cNvPicPr>
+            <a:picLocks noGrp="1" noChangeAspect="1"/>
+          </p:cNvPicPr>
           <p:nvPr>
-            <p:ph sz="half" idx="1"/>
+            <p:ph idx="1"/>
           </p:nvPr>
-        </p:nvSpPr>
+        </p:nvPicPr>
+        <p:blipFill>
+          <a:blip r:embed="rId3">
+            <a:extLst>
+              <a:ext uri="{28A0092B-C50C-407E-A947-70E740481C1C}">
+                <a14:useLocalDpi xmlns:a14="http://schemas.microsoft.com/office/drawing/2010/main" val="0"/>
+              </a:ext>
+            </a:extLst>
+          </a:blip>
+          <a:stretch>
+            <a:fillRect/>
+          </a:stretch>
+        </p:blipFill>
         <p:spPr>
           <a:xfrm>
-            <a:off x="614674" y="1896367"/>
-            <a:ext cx="5501641" cy="4412233"/>
+            <a:off x="2693128" y="2341563"/>
+            <a:ext cx="6805743" cy="3633787"/>
           </a:xfrm>
         </p:spPr>
-        <p:txBody>
-          <a:bodyPr>
-            <a:normAutofit/>
-          </a:bodyPr>
-          <a:lstStyle/>
-          <a:p>
-            <a:endParaRPr lang="fr-FR" sz="1800" dirty="0">
-              <a:solidFill>
-                <a:schemeClr val="tx1"/>
-              </a:solidFill>
-              <a:ea typeface="Calibri" pitchFamily="34" charset="-122"/>
-              <a:cs typeface="Calibri" pitchFamily="34" charset="-120"/>
-            </a:endParaRPr>
-          </a:p>
-          <a:p>
-            <a:r>
-              <a:rPr lang="fr-FR" sz="1800" dirty="0">
-                <a:solidFill>
-                  <a:schemeClr val="tx1"/>
-                </a:solidFill>
-                <a:ea typeface="Calibri" pitchFamily="34" charset="-122"/>
-                <a:cs typeface="Calibri" pitchFamily="34" charset="-120"/>
-              </a:rPr>
-              <a:t>Un socle météo prêt à grandir</a:t>
-            </a:r>
-          </a:p>
-          <a:p>
-            <a:r>
-              <a:rPr lang="fr-FR" sz="1800" dirty="0">
-                <a:solidFill>
-                  <a:schemeClr val="tx1"/>
-                </a:solidFill>
-              </a:rPr>
-              <a:t>Une base structurée, contrôlée et documentée. </a:t>
-            </a:r>
-          </a:p>
-          <a:p>
-            <a:r>
-              <a:rPr lang="fr-FR" sz="1800" dirty="0">
-                <a:solidFill>
-                  <a:schemeClr val="tx1"/>
-                </a:solidFill>
-              </a:rPr>
-              <a:t>La prochaine étape est l’observabilité opérationnelle et la fiabilisation du déploiement </a:t>
-            </a:r>
-            <a:r>
-              <a:rPr lang="fr-FR" sz="1800" dirty="0" err="1">
-                <a:solidFill>
-                  <a:schemeClr val="tx1"/>
-                </a:solidFill>
-              </a:rPr>
-              <a:t>Airbyte</a:t>
-            </a:r>
-            <a:r>
-              <a:rPr lang="fr-FR" sz="1800" dirty="0">
-                <a:solidFill>
-                  <a:schemeClr val="tx1"/>
-                </a:solidFill>
-              </a:rPr>
-              <a:t>.</a:t>
-            </a:r>
-            <a:endParaRPr lang="fr-FR" sz="1800" dirty="0">
-              <a:solidFill>
-                <a:schemeClr val="tx1"/>
-              </a:solidFill>
-              <a:ea typeface="Calibri" pitchFamily="34" charset="-122"/>
-              <a:cs typeface="Calibri" pitchFamily="34" charset="-120"/>
-            </a:endParaRPr>
-          </a:p>
-          <a:p>
-            <a:endParaRPr lang="fr-FR" sz="1800" dirty="0">
-              <a:solidFill>
-                <a:schemeClr val="tx1"/>
-              </a:solidFill>
-              <a:ea typeface="Calibri" pitchFamily="34" charset="-122"/>
-              <a:cs typeface="Calibri" pitchFamily="34" charset="-120"/>
-            </a:endParaRPr>
-          </a:p>
-          <a:p>
-            <a:endParaRPr lang="fr-FR" sz="1800" dirty="0">
-              <a:solidFill>
-                <a:schemeClr val="tx1"/>
-              </a:solidFill>
-              <a:ea typeface="Calibri" pitchFamily="34" charset="-122"/>
-              <a:cs typeface="Calibri" pitchFamily="34" charset="-120"/>
-            </a:endParaRPr>
-          </a:p>
-          <a:p>
-            <a:endParaRPr lang="fr-FR" sz="1800" dirty="0">
-              <a:solidFill>
-                <a:schemeClr val="tx1"/>
-              </a:solidFill>
-              <a:ea typeface="Calibri" pitchFamily="34" charset="-122"/>
-              <a:cs typeface="Calibri" pitchFamily="34" charset="-120"/>
-            </a:endParaRPr>
-          </a:p>
-          <a:p>
-            <a:endParaRPr lang="fr-FR" sz="1800" dirty="0">
-              <a:solidFill>
-                <a:schemeClr val="tx1"/>
-              </a:solidFill>
-              <a:ea typeface="Calibri" pitchFamily="34" charset="-122"/>
-              <a:cs typeface="Calibri" pitchFamily="34" charset="-120"/>
-            </a:endParaRPr>
-          </a:p>
-          <a:p>
-            <a:endParaRPr lang="fr-FR" sz="1800" dirty="0">
-              <a:solidFill>
-                <a:schemeClr val="tx1"/>
-              </a:solidFill>
-              <a:ea typeface="Calibri" pitchFamily="34" charset="-122"/>
-              <a:cs typeface="Calibri" pitchFamily="34" charset="-120"/>
-            </a:endParaRPr>
-          </a:p>
-          <a:p>
-            <a:endParaRPr lang="fr-FR" sz="1800" dirty="0">
-              <a:solidFill>
-                <a:schemeClr val="tx1"/>
-              </a:solidFill>
-              <a:ea typeface="Calibri" pitchFamily="34" charset="-122"/>
-              <a:cs typeface="Calibri" pitchFamily="34" charset="-120"/>
-            </a:endParaRPr>
-          </a:p>
-          <a:p>
-            <a:endParaRPr lang="fr-FR" sz="1800" dirty="0">
-              <a:solidFill>
-                <a:schemeClr val="tx1"/>
-              </a:solidFill>
-              <a:ea typeface="Calibri" pitchFamily="34" charset="-122"/>
-              <a:cs typeface="Calibri" pitchFamily="34" charset="-120"/>
-            </a:endParaRPr>
-          </a:p>
-        </p:txBody>
-      </p:sp>
-      <p:sp>
-        <p:nvSpPr>
-          <p:cNvPr id="10" name="Espace réservé du contenu 9">
-            <a:extLst>
-              <a:ext uri="{FF2B5EF4-FFF2-40B4-BE49-F238E27FC236}">
-                <a16:creationId xmlns:a16="http://schemas.microsoft.com/office/drawing/2014/main" id="{194F2B51-DED5-21C8-C7D5-65B4B3DBB939}"/>
-              </a:ext>
-            </a:extLst>
-          </p:cNvPr>
-          <p:cNvSpPr>
-            <a:spLocks noGrp="1"/>
-          </p:cNvSpPr>
-          <p:nvPr>
-            <p:ph sz="half" idx="2"/>
-          </p:nvPr>
-        </p:nvSpPr>
-        <p:spPr>
-          <a:xfrm>
-            <a:off x="6416039" y="1717989"/>
-            <a:ext cx="5501641" cy="5071049"/>
-          </a:xfrm>
-        </p:spPr>
-        <p:txBody>
-          <a:bodyPr>
-            <a:normAutofit/>
-          </a:bodyPr>
-          <a:lstStyle/>
-          <a:p>
-            <a:pPr marL="0" indent="0">
-              <a:buNone/>
-            </a:pPr>
-            <a:endParaRPr lang="fr-FR" b="1" u="sng" dirty="0">
-              <a:solidFill>
-                <a:schemeClr val="tx1"/>
-              </a:solidFill>
-            </a:endParaRPr>
-          </a:p>
-          <a:p>
-            <a:pPr marL="0" indent="0">
-              <a:buNone/>
-            </a:pPr>
-            <a:endParaRPr lang="fr-FR" b="1" u="sng" dirty="0">
-              <a:solidFill>
-                <a:schemeClr val="tx1"/>
-              </a:solidFill>
-            </a:endParaRPr>
-          </a:p>
-          <a:p>
-            <a:pPr marL="0" indent="0">
-              <a:buNone/>
-            </a:pPr>
-            <a:endParaRPr lang="fr-FR" b="1" u="sng" dirty="0">
-              <a:solidFill>
-                <a:schemeClr val="tx1"/>
-              </a:solidFill>
-            </a:endParaRPr>
-          </a:p>
-          <a:p>
-            <a:pPr marL="0" indent="0">
-              <a:buNone/>
-            </a:pPr>
-            <a:endParaRPr lang="fr-FR" b="1" u="sng" dirty="0">
-              <a:solidFill>
-                <a:schemeClr val="tx1"/>
-              </a:solidFill>
-            </a:endParaRPr>
-          </a:p>
-          <a:p>
-            <a:pPr marL="0" indent="0">
-              <a:buNone/>
-            </a:pPr>
-            <a:endParaRPr lang="fr-FR" b="1" u="sng" dirty="0">
-              <a:solidFill>
-                <a:schemeClr val="tx1"/>
-              </a:solidFill>
-            </a:endParaRPr>
-          </a:p>
-          <a:p>
-            <a:pPr marL="0" indent="0">
-              <a:buNone/>
-            </a:pPr>
-            <a:endParaRPr lang="fr-FR" b="1" u="sng" dirty="0">
-              <a:solidFill>
-                <a:schemeClr val="tx1"/>
-              </a:solidFill>
-            </a:endParaRPr>
-          </a:p>
-          <a:p>
-            <a:pPr marL="0" indent="0">
-              <a:buNone/>
-            </a:pPr>
-            <a:endParaRPr lang="fr-FR" b="1" u="sng" dirty="0">
-              <a:solidFill>
-                <a:schemeClr val="tx1"/>
-              </a:solidFill>
-            </a:endParaRPr>
-          </a:p>
-        </p:txBody>
-      </p:sp>
+      </p:pic>
       <p:sp>
         <p:nvSpPr>
           <p:cNvPr id="4" name="Espace réservé de la date 3">
             <a:extLst>
               <a:ext uri="{FF2B5EF4-FFF2-40B4-BE49-F238E27FC236}">
-                <a16:creationId xmlns:a16="http://schemas.microsoft.com/office/drawing/2014/main" id="{41886762-B5AB-8018-4F83-43D534310D69}"/>
+                <a16:creationId xmlns:a16="http://schemas.microsoft.com/office/drawing/2014/main" id="{C1497F1F-7CE9-5301-CBED-59FA0A872D11}"/>
               </a:ext>
             </a:extLst>
           </p:cNvPr>
@@ -13035,844 +12676,18 @@
           <a:lstStyle/>
           <a:p>
             <a:pPr rtl="0"/>
-            <a:fld id="{A1255F31-5DB3-4925-BA87-822F5B17A2F1}" type="datetime1">
+            <a:fld id="{22897033-9A55-4DAC-991D-1FF1921C78B7}" type="datetime1">
               <a:rPr lang="fr-FR" smtClean="0"/>
-              <a:t>28/09/2026</a:t>
+              <a:t>02/10/2026</a:t>
             </a:fld>
             <a:endParaRPr lang="en-US" dirty="0"/>
           </a:p>
         </p:txBody>
       </p:sp>
-      <p:grpSp>
-        <p:nvGrpSpPr>
-          <p:cNvPr id="27" name="Groupe 26">
-            <a:extLst>
-              <a:ext uri="{FF2B5EF4-FFF2-40B4-BE49-F238E27FC236}">
-                <a16:creationId xmlns:a16="http://schemas.microsoft.com/office/drawing/2014/main" id="{52691BAD-08AB-B78A-CC60-835F24A8FF14}"/>
-              </a:ext>
-            </a:extLst>
-          </p:cNvPr>
-          <p:cNvGrpSpPr/>
-          <p:nvPr/>
-        </p:nvGrpSpPr>
-        <p:grpSpPr>
-          <a:xfrm>
-            <a:off x="731520" y="4156040"/>
-            <a:ext cx="10698480" cy="1417320"/>
-            <a:chOff x="731520" y="2103120"/>
-            <a:chExt cx="10698480" cy="1417320"/>
-          </a:xfrm>
-        </p:grpSpPr>
-        <p:sp>
-          <p:nvSpPr>
-            <p:cNvPr id="7" name="Rounded Rectangle 4">
-              <a:extLst>
-                <a:ext uri="{FF2B5EF4-FFF2-40B4-BE49-F238E27FC236}">
-                  <a16:creationId xmlns:a16="http://schemas.microsoft.com/office/drawing/2014/main" id="{4CD7F2C1-B3B3-B492-3FD4-B95DF910DD67}"/>
-                </a:ext>
-              </a:extLst>
-            </p:cNvPr>
-            <p:cNvSpPr/>
-            <p:nvPr/>
-          </p:nvSpPr>
-          <p:spPr>
-            <a:xfrm>
-              <a:off x="731520" y="2103120"/>
-              <a:ext cx="2331720" cy="1417320"/>
-            </a:xfrm>
-            <a:prstGeom prst="roundRect">
-              <a:avLst/>
-            </a:prstGeom>
-            <a:solidFill>
-              <a:srgbClr val="FFFFFF"/>
-            </a:solidFill>
-            <a:ln w="10160">
-              <a:solidFill>
-                <a:srgbClr val="DCE3EA"/>
-              </a:solidFill>
-            </a:ln>
-          </p:spPr>
-          <p:style>
-            <a:lnRef idx="1">
-              <a:schemeClr val="accent1"/>
-            </a:lnRef>
-            <a:fillRef idx="3">
-              <a:schemeClr val="accent1"/>
-            </a:fillRef>
-            <a:effectRef idx="2">
-              <a:schemeClr val="accent1"/>
-            </a:effectRef>
-            <a:fontRef idx="minor">
-              <a:schemeClr val="lt1"/>
-            </a:fontRef>
-          </p:style>
-          <p:txBody>
-            <a:bodyPr rtlCol="0" anchor="ctr"/>
-            <a:lstStyle/>
-            <a:p>
-              <a:pPr algn="ctr"/>
-              <a:endParaRPr>
-                <a:solidFill>
-                  <a:schemeClr val="tx1"/>
-                </a:solidFill>
-              </a:endParaRPr>
-            </a:p>
-          </p:txBody>
-        </p:sp>
-        <p:sp>
-          <p:nvSpPr>
-            <p:cNvPr id="11" name="Rectangle 10">
-              <a:extLst>
-                <a:ext uri="{FF2B5EF4-FFF2-40B4-BE49-F238E27FC236}">
-                  <a16:creationId xmlns:a16="http://schemas.microsoft.com/office/drawing/2014/main" id="{132148C4-404F-62BD-03B2-FC89CEB5D8ED}"/>
-                </a:ext>
-              </a:extLst>
-            </p:cNvPr>
-            <p:cNvSpPr/>
-            <p:nvPr/>
-          </p:nvSpPr>
-          <p:spPr>
-            <a:xfrm>
-              <a:off x="731520" y="2103120"/>
-              <a:ext cx="73152" cy="1417320"/>
-            </a:xfrm>
-            <a:prstGeom prst="rect">
-              <a:avLst/>
-            </a:prstGeom>
-            <a:solidFill>
-              <a:srgbClr val="17BEBB"/>
-            </a:solidFill>
-            <a:ln w="10160">
-              <a:solidFill>
-                <a:srgbClr val="17BEBB"/>
-              </a:solidFill>
-            </a:ln>
-          </p:spPr>
-          <p:style>
-            <a:lnRef idx="1">
-              <a:schemeClr val="accent1"/>
-            </a:lnRef>
-            <a:fillRef idx="3">
-              <a:schemeClr val="accent1"/>
-            </a:fillRef>
-            <a:effectRef idx="2">
-              <a:schemeClr val="accent1"/>
-            </a:effectRef>
-            <a:fontRef idx="minor">
-              <a:schemeClr val="lt1"/>
-            </a:fontRef>
-          </p:style>
-          <p:txBody>
-            <a:bodyPr rtlCol="0" anchor="ctr"/>
-            <a:lstStyle/>
-            <a:p>
-              <a:pPr algn="ctr"/>
-              <a:endParaRPr>
-                <a:solidFill>
-                  <a:schemeClr val="tx1"/>
-                </a:solidFill>
-              </a:endParaRPr>
-            </a:p>
-          </p:txBody>
-        </p:sp>
-        <p:sp>
-          <p:nvSpPr>
-            <p:cNvPr id="12" name="TextBox 6">
-              <a:extLst>
-                <a:ext uri="{FF2B5EF4-FFF2-40B4-BE49-F238E27FC236}">
-                  <a16:creationId xmlns:a16="http://schemas.microsoft.com/office/drawing/2014/main" id="{19711A0D-E243-1E55-16B8-FA9C69809BFE}"/>
-                </a:ext>
-              </a:extLst>
-            </p:cNvPr>
-            <p:cNvSpPr txBox="1"/>
-            <p:nvPr/>
-          </p:nvSpPr>
-          <p:spPr>
-            <a:xfrm>
-              <a:off x="932688" y="2286000"/>
-              <a:ext cx="2011679" cy="323165"/>
-            </a:xfrm>
-            <a:prstGeom prst="rect">
-              <a:avLst/>
-            </a:prstGeom>
-            <a:noFill/>
-          </p:spPr>
-          <p:txBody>
-            <a:bodyPr wrap="square" lIns="45720" rIns="45720" anchor="t">
-              <a:spAutoFit/>
-            </a:bodyPr>
-            <a:lstStyle/>
-            <a:p>
-              <a:pPr algn="l">
-                <a:defRPr sz="1500" b="1">
-                  <a:solidFill>
-                    <a:srgbClr val="14213D"/>
-                  </a:solidFill>
-                  <a:latin typeface="Aptos"/>
-                </a:defRPr>
-              </a:pPr>
-              <a:r>
-                <a:t>Fiable</a:t>
-              </a:r>
-            </a:p>
-          </p:txBody>
-        </p:sp>
-        <p:sp>
-          <p:nvSpPr>
-            <p:cNvPr id="13" name="TextBox 7">
-              <a:extLst>
-                <a:ext uri="{FF2B5EF4-FFF2-40B4-BE49-F238E27FC236}">
-                  <a16:creationId xmlns:a16="http://schemas.microsoft.com/office/drawing/2014/main" id="{0535E353-C77A-7BA6-191C-72AE969C1E66}"/>
-                </a:ext>
-              </a:extLst>
-            </p:cNvPr>
-            <p:cNvSpPr txBox="1"/>
-            <p:nvPr/>
-          </p:nvSpPr>
-          <p:spPr>
-            <a:xfrm>
-              <a:off x="932688" y="2670048"/>
-              <a:ext cx="2011679" cy="276999"/>
-            </a:xfrm>
-            <a:prstGeom prst="rect">
-              <a:avLst/>
-            </a:prstGeom>
-            <a:noFill/>
-          </p:spPr>
-          <p:txBody>
-            <a:bodyPr wrap="square" lIns="45720" rIns="45720" anchor="t">
-              <a:spAutoFit/>
-            </a:bodyPr>
-            <a:lstStyle/>
-            <a:p>
-              <a:pPr algn="l">
-                <a:defRPr sz="1200" b="0">
-                  <a:solidFill>
-                    <a:srgbClr val="5B6770"/>
-                  </a:solidFill>
-                  <a:latin typeface="Aptos"/>
-                </a:defRPr>
-              </a:pPr>
-              <a:r>
-                <a:rPr lang="fr-FR" dirty="0"/>
-                <a:t>26</a:t>
-              </a:r>
-              <a:r>
-                <a:rPr dirty="0"/>
-                <a:t>/</a:t>
-              </a:r>
-              <a:r>
-                <a:rPr lang="fr-FR" dirty="0"/>
-                <a:t>26</a:t>
-              </a:r>
-              <a:r>
-                <a:rPr dirty="0"/>
-                <a:t> tests PASS</a:t>
-              </a:r>
-            </a:p>
-          </p:txBody>
-        </p:sp>
-        <p:sp>
-          <p:nvSpPr>
-            <p:cNvPr id="14" name="Rounded Rectangle 8">
-              <a:extLst>
-                <a:ext uri="{FF2B5EF4-FFF2-40B4-BE49-F238E27FC236}">
-                  <a16:creationId xmlns:a16="http://schemas.microsoft.com/office/drawing/2014/main" id="{254C3378-B827-B28B-79A8-81437A38D090}"/>
-                </a:ext>
-              </a:extLst>
-            </p:cNvPr>
-            <p:cNvSpPr/>
-            <p:nvPr/>
-          </p:nvSpPr>
-          <p:spPr>
-            <a:xfrm>
-              <a:off x="3520439" y="2103120"/>
-              <a:ext cx="2331720" cy="1417320"/>
-            </a:xfrm>
-            <a:prstGeom prst="roundRect">
-              <a:avLst/>
-            </a:prstGeom>
-            <a:solidFill>
-              <a:srgbClr val="FFFFFF"/>
-            </a:solidFill>
-            <a:ln w="10160">
-              <a:solidFill>
-                <a:srgbClr val="DCE3EA"/>
-              </a:solidFill>
-            </a:ln>
-          </p:spPr>
-          <p:style>
-            <a:lnRef idx="1">
-              <a:schemeClr val="accent1"/>
-            </a:lnRef>
-            <a:fillRef idx="3">
-              <a:schemeClr val="accent1"/>
-            </a:fillRef>
-            <a:effectRef idx="2">
-              <a:schemeClr val="accent1"/>
-            </a:effectRef>
-            <a:fontRef idx="minor">
-              <a:schemeClr val="lt1"/>
-            </a:fontRef>
-          </p:style>
-          <p:txBody>
-            <a:bodyPr rtlCol="0" anchor="ctr"/>
-            <a:lstStyle/>
-            <a:p>
-              <a:pPr algn="ctr"/>
-              <a:endParaRPr>
-                <a:solidFill>
-                  <a:schemeClr val="tx1"/>
-                </a:solidFill>
-              </a:endParaRPr>
-            </a:p>
-          </p:txBody>
-        </p:sp>
-        <p:sp>
-          <p:nvSpPr>
-            <p:cNvPr id="15" name="Rectangle 14">
-              <a:extLst>
-                <a:ext uri="{FF2B5EF4-FFF2-40B4-BE49-F238E27FC236}">
-                  <a16:creationId xmlns:a16="http://schemas.microsoft.com/office/drawing/2014/main" id="{4E79B3F0-D919-4941-8494-C72C6F9F155F}"/>
-                </a:ext>
-              </a:extLst>
-            </p:cNvPr>
-            <p:cNvSpPr/>
-            <p:nvPr/>
-          </p:nvSpPr>
-          <p:spPr>
-            <a:xfrm>
-              <a:off x="3520439" y="2103120"/>
-              <a:ext cx="73152" cy="1417320"/>
-            </a:xfrm>
-            <a:prstGeom prst="rect">
-              <a:avLst/>
-            </a:prstGeom>
-            <a:solidFill>
-              <a:srgbClr val="F2C14E"/>
-            </a:solidFill>
-            <a:ln w="10160">
-              <a:solidFill>
-                <a:srgbClr val="F2C14E"/>
-              </a:solidFill>
-            </a:ln>
-          </p:spPr>
-          <p:style>
-            <a:lnRef idx="1">
-              <a:schemeClr val="accent1"/>
-            </a:lnRef>
-            <a:fillRef idx="3">
-              <a:schemeClr val="accent1"/>
-            </a:fillRef>
-            <a:effectRef idx="2">
-              <a:schemeClr val="accent1"/>
-            </a:effectRef>
-            <a:fontRef idx="minor">
-              <a:schemeClr val="lt1"/>
-            </a:fontRef>
-          </p:style>
-          <p:txBody>
-            <a:bodyPr rtlCol="0" anchor="ctr"/>
-            <a:lstStyle/>
-            <a:p>
-              <a:pPr algn="ctr"/>
-              <a:endParaRPr>
-                <a:solidFill>
-                  <a:schemeClr val="tx1"/>
-                </a:solidFill>
-              </a:endParaRPr>
-            </a:p>
-          </p:txBody>
-        </p:sp>
-        <p:sp>
-          <p:nvSpPr>
-            <p:cNvPr id="16" name="TextBox 10">
-              <a:extLst>
-                <a:ext uri="{FF2B5EF4-FFF2-40B4-BE49-F238E27FC236}">
-                  <a16:creationId xmlns:a16="http://schemas.microsoft.com/office/drawing/2014/main" id="{5CAD90E6-2204-0C8A-4092-98AC13F45991}"/>
-                </a:ext>
-              </a:extLst>
-            </p:cNvPr>
-            <p:cNvSpPr txBox="1"/>
-            <p:nvPr/>
-          </p:nvSpPr>
-          <p:spPr>
-            <a:xfrm>
-              <a:off x="3721607" y="2286000"/>
-              <a:ext cx="2011679" cy="323165"/>
-            </a:xfrm>
-            <a:prstGeom prst="rect">
-              <a:avLst/>
-            </a:prstGeom>
-            <a:noFill/>
-          </p:spPr>
-          <p:txBody>
-            <a:bodyPr wrap="square" lIns="45720" rIns="45720" anchor="t">
-              <a:spAutoFit/>
-            </a:bodyPr>
-            <a:lstStyle/>
-            <a:p>
-              <a:pPr algn="l">
-                <a:defRPr sz="1500" b="1">
-                  <a:solidFill>
-                    <a:srgbClr val="14213D"/>
-                  </a:solidFill>
-                  <a:latin typeface="Aptos"/>
-                </a:defRPr>
-              </a:pPr>
-              <a:r>
-                <a:rPr dirty="0" err="1"/>
-                <a:t>Lisible</a:t>
-              </a:r>
-              <a:endParaRPr dirty="0"/>
-            </a:p>
-          </p:txBody>
-        </p:sp>
-        <p:sp>
-          <p:nvSpPr>
-            <p:cNvPr id="17" name="TextBox 11">
-              <a:extLst>
-                <a:ext uri="{FF2B5EF4-FFF2-40B4-BE49-F238E27FC236}">
-                  <a16:creationId xmlns:a16="http://schemas.microsoft.com/office/drawing/2014/main" id="{239CB367-7838-9D8E-0D1D-42CA6AD78265}"/>
-                </a:ext>
-              </a:extLst>
-            </p:cNvPr>
-            <p:cNvSpPr txBox="1"/>
-            <p:nvPr/>
-          </p:nvSpPr>
-          <p:spPr>
-            <a:xfrm>
-              <a:off x="3721607" y="2670048"/>
-              <a:ext cx="2011679" cy="276999"/>
-            </a:xfrm>
-            <a:prstGeom prst="rect">
-              <a:avLst/>
-            </a:prstGeom>
-            <a:noFill/>
-          </p:spPr>
-          <p:txBody>
-            <a:bodyPr wrap="square" lIns="45720" rIns="45720" anchor="t">
-              <a:spAutoFit/>
-            </a:bodyPr>
-            <a:lstStyle/>
-            <a:p>
-              <a:pPr algn="l">
-                <a:defRPr sz="1200" b="0">
-                  <a:solidFill>
-                    <a:srgbClr val="5B6770"/>
-                  </a:solidFill>
-                  <a:latin typeface="Aptos"/>
-                </a:defRPr>
-              </a:pPr>
-              <a:r>
-                <a:t>Lineage + docs DBT</a:t>
-              </a:r>
-            </a:p>
-          </p:txBody>
-        </p:sp>
-        <p:sp>
-          <p:nvSpPr>
-            <p:cNvPr id="18" name="Rounded Rectangle 12">
-              <a:extLst>
-                <a:ext uri="{FF2B5EF4-FFF2-40B4-BE49-F238E27FC236}">
-                  <a16:creationId xmlns:a16="http://schemas.microsoft.com/office/drawing/2014/main" id="{896123B5-B372-6F23-ED25-4D182E87871C}"/>
-                </a:ext>
-              </a:extLst>
-            </p:cNvPr>
-            <p:cNvSpPr/>
-            <p:nvPr/>
-          </p:nvSpPr>
-          <p:spPr>
-            <a:xfrm>
-              <a:off x="6309359" y="2103120"/>
-              <a:ext cx="2331720" cy="1417320"/>
-            </a:xfrm>
-            <a:prstGeom prst="roundRect">
-              <a:avLst/>
-            </a:prstGeom>
-            <a:solidFill>
-              <a:srgbClr val="FFFFFF"/>
-            </a:solidFill>
-            <a:ln w="10160">
-              <a:solidFill>
-                <a:srgbClr val="DCE3EA"/>
-              </a:solidFill>
-            </a:ln>
-          </p:spPr>
-          <p:style>
-            <a:lnRef idx="1">
-              <a:schemeClr val="accent1"/>
-            </a:lnRef>
-            <a:fillRef idx="3">
-              <a:schemeClr val="accent1"/>
-            </a:fillRef>
-            <a:effectRef idx="2">
-              <a:schemeClr val="accent1"/>
-            </a:effectRef>
-            <a:fontRef idx="minor">
-              <a:schemeClr val="lt1"/>
-            </a:fontRef>
-          </p:style>
-          <p:txBody>
-            <a:bodyPr rtlCol="0" anchor="ctr"/>
-            <a:lstStyle/>
-            <a:p>
-              <a:pPr algn="ctr"/>
-              <a:endParaRPr>
-                <a:solidFill>
-                  <a:schemeClr val="tx1"/>
-                </a:solidFill>
-              </a:endParaRPr>
-            </a:p>
-          </p:txBody>
-        </p:sp>
-        <p:sp>
-          <p:nvSpPr>
-            <p:cNvPr id="19" name="Rectangle 18">
-              <a:extLst>
-                <a:ext uri="{FF2B5EF4-FFF2-40B4-BE49-F238E27FC236}">
-                  <a16:creationId xmlns:a16="http://schemas.microsoft.com/office/drawing/2014/main" id="{D72692B6-E82F-14FC-9A32-33A4BC6BEF01}"/>
-                </a:ext>
-              </a:extLst>
-            </p:cNvPr>
-            <p:cNvSpPr/>
-            <p:nvPr/>
-          </p:nvSpPr>
-          <p:spPr>
-            <a:xfrm>
-              <a:off x="6309359" y="2103120"/>
-              <a:ext cx="73152" cy="1417320"/>
-            </a:xfrm>
-            <a:prstGeom prst="rect">
-              <a:avLst/>
-            </a:prstGeom>
-            <a:solidFill>
-              <a:srgbClr val="D9F0F0"/>
-            </a:solidFill>
-            <a:ln w="10160">
-              <a:solidFill>
-                <a:srgbClr val="D9F0F0"/>
-              </a:solidFill>
-            </a:ln>
-          </p:spPr>
-          <p:style>
-            <a:lnRef idx="1">
-              <a:schemeClr val="accent1"/>
-            </a:lnRef>
-            <a:fillRef idx="3">
-              <a:schemeClr val="accent1"/>
-            </a:fillRef>
-            <a:effectRef idx="2">
-              <a:schemeClr val="accent1"/>
-            </a:effectRef>
-            <a:fontRef idx="minor">
-              <a:schemeClr val="lt1"/>
-            </a:fontRef>
-          </p:style>
-          <p:txBody>
-            <a:bodyPr rtlCol="0" anchor="ctr"/>
-            <a:lstStyle/>
-            <a:p>
-              <a:pPr algn="ctr"/>
-              <a:endParaRPr>
-                <a:solidFill>
-                  <a:schemeClr val="tx1"/>
-                </a:solidFill>
-              </a:endParaRPr>
-            </a:p>
-          </p:txBody>
-        </p:sp>
-        <p:sp>
-          <p:nvSpPr>
-            <p:cNvPr id="20" name="TextBox 14">
-              <a:extLst>
-                <a:ext uri="{FF2B5EF4-FFF2-40B4-BE49-F238E27FC236}">
-                  <a16:creationId xmlns:a16="http://schemas.microsoft.com/office/drawing/2014/main" id="{0C269E9C-0F70-E672-861F-DB9C6BA33DC0}"/>
-                </a:ext>
-              </a:extLst>
-            </p:cNvPr>
-            <p:cNvSpPr txBox="1"/>
-            <p:nvPr/>
-          </p:nvSpPr>
-          <p:spPr>
-            <a:xfrm>
-              <a:off x="6510527" y="2286000"/>
-              <a:ext cx="2011679" cy="323165"/>
-            </a:xfrm>
-            <a:prstGeom prst="rect">
-              <a:avLst/>
-            </a:prstGeom>
-            <a:noFill/>
-          </p:spPr>
-          <p:txBody>
-            <a:bodyPr wrap="square" lIns="45720" rIns="45720" anchor="t">
-              <a:spAutoFit/>
-            </a:bodyPr>
-            <a:lstStyle/>
-            <a:p>
-              <a:pPr algn="l">
-                <a:defRPr sz="1500" b="1">
-                  <a:solidFill>
-                    <a:srgbClr val="14213D"/>
-                  </a:solidFill>
-                  <a:latin typeface="Aptos"/>
-                </a:defRPr>
-              </a:pPr>
-              <a:r>
-                <a:t>Performant</a:t>
-              </a:r>
-            </a:p>
-          </p:txBody>
-        </p:sp>
-        <p:sp>
-          <p:nvSpPr>
-            <p:cNvPr id="21" name="TextBox 15">
-              <a:extLst>
-                <a:ext uri="{FF2B5EF4-FFF2-40B4-BE49-F238E27FC236}">
-                  <a16:creationId xmlns:a16="http://schemas.microsoft.com/office/drawing/2014/main" id="{F4D65C81-E123-C243-E9B1-D5FFF178439E}"/>
-                </a:ext>
-              </a:extLst>
-            </p:cNvPr>
-            <p:cNvSpPr txBox="1"/>
-            <p:nvPr/>
-          </p:nvSpPr>
-          <p:spPr>
-            <a:xfrm>
-              <a:off x="6510527" y="2670048"/>
-              <a:ext cx="2011679" cy="276999"/>
-            </a:xfrm>
-            <a:prstGeom prst="rect">
-              <a:avLst/>
-            </a:prstGeom>
-            <a:noFill/>
-          </p:spPr>
-          <p:txBody>
-            <a:bodyPr wrap="square" lIns="45720" rIns="45720" anchor="t">
-              <a:spAutoFit/>
-            </a:bodyPr>
-            <a:lstStyle/>
-            <a:p>
-              <a:pPr algn="l">
-                <a:defRPr sz="1200" b="0">
-                  <a:solidFill>
-                    <a:srgbClr val="5B6770"/>
-                  </a:solidFill>
-                  <a:latin typeface="Aptos"/>
-                </a:defRPr>
-              </a:pPr>
-              <a:r>
-                <a:rPr lang="fr-FR" dirty="0"/>
-                <a:t>1,44</a:t>
-              </a:r>
-              <a:r>
-                <a:rPr dirty="0"/>
-                <a:t> s sur les marts</a:t>
-              </a:r>
-            </a:p>
-          </p:txBody>
-        </p:sp>
-        <p:sp>
-          <p:nvSpPr>
-            <p:cNvPr id="22" name="Rounded Rectangle 16">
-              <a:extLst>
-                <a:ext uri="{FF2B5EF4-FFF2-40B4-BE49-F238E27FC236}">
-                  <a16:creationId xmlns:a16="http://schemas.microsoft.com/office/drawing/2014/main" id="{F4485261-4999-DA8F-A3D5-E79BC9EA4A88}"/>
-                </a:ext>
-              </a:extLst>
-            </p:cNvPr>
-            <p:cNvSpPr/>
-            <p:nvPr/>
-          </p:nvSpPr>
-          <p:spPr>
-            <a:xfrm>
-              <a:off x="9098280" y="2103120"/>
-              <a:ext cx="2331720" cy="1417320"/>
-            </a:xfrm>
-            <a:prstGeom prst="roundRect">
-              <a:avLst/>
-            </a:prstGeom>
-            <a:solidFill>
-              <a:srgbClr val="FFFFFF"/>
-            </a:solidFill>
-            <a:ln w="10160">
-              <a:solidFill>
-                <a:srgbClr val="DCE3EA"/>
-              </a:solidFill>
-            </a:ln>
-          </p:spPr>
-          <p:style>
-            <a:lnRef idx="1">
-              <a:schemeClr val="accent1"/>
-            </a:lnRef>
-            <a:fillRef idx="3">
-              <a:schemeClr val="accent1"/>
-            </a:fillRef>
-            <a:effectRef idx="2">
-              <a:schemeClr val="accent1"/>
-            </a:effectRef>
-            <a:fontRef idx="minor">
-              <a:schemeClr val="lt1"/>
-            </a:fontRef>
-          </p:style>
-          <p:txBody>
-            <a:bodyPr rtlCol="0" anchor="ctr"/>
-            <a:lstStyle/>
-            <a:p>
-              <a:pPr algn="ctr"/>
-              <a:endParaRPr>
-                <a:solidFill>
-                  <a:schemeClr val="tx1"/>
-                </a:solidFill>
-              </a:endParaRPr>
-            </a:p>
-          </p:txBody>
-        </p:sp>
-        <p:sp>
-          <p:nvSpPr>
-            <p:cNvPr id="23" name="Rectangle 22">
-              <a:extLst>
-                <a:ext uri="{FF2B5EF4-FFF2-40B4-BE49-F238E27FC236}">
-                  <a16:creationId xmlns:a16="http://schemas.microsoft.com/office/drawing/2014/main" id="{86068818-B279-7D37-9820-C9879D6CCDE3}"/>
-                </a:ext>
-              </a:extLst>
-            </p:cNvPr>
-            <p:cNvSpPr/>
-            <p:nvPr/>
-          </p:nvSpPr>
-          <p:spPr>
-            <a:xfrm>
-              <a:off x="9098280" y="2103120"/>
-              <a:ext cx="73152" cy="1417320"/>
-            </a:xfrm>
-            <a:prstGeom prst="rect">
-              <a:avLst/>
-            </a:prstGeom>
-            <a:solidFill>
-              <a:srgbClr val="3AA76D"/>
-            </a:solidFill>
-            <a:ln w="10160">
-              <a:solidFill>
-                <a:srgbClr val="3AA76D"/>
-              </a:solidFill>
-            </a:ln>
-          </p:spPr>
-          <p:style>
-            <a:lnRef idx="1">
-              <a:schemeClr val="accent1"/>
-            </a:lnRef>
-            <a:fillRef idx="3">
-              <a:schemeClr val="accent1"/>
-            </a:fillRef>
-            <a:effectRef idx="2">
-              <a:schemeClr val="accent1"/>
-            </a:effectRef>
-            <a:fontRef idx="minor">
-              <a:schemeClr val="lt1"/>
-            </a:fontRef>
-          </p:style>
-          <p:txBody>
-            <a:bodyPr rtlCol="0" anchor="ctr"/>
-            <a:lstStyle/>
-            <a:p>
-              <a:pPr algn="ctr"/>
-              <a:endParaRPr>
-                <a:solidFill>
-                  <a:schemeClr val="tx1"/>
-                </a:solidFill>
-              </a:endParaRPr>
-            </a:p>
-          </p:txBody>
-        </p:sp>
-        <p:sp>
-          <p:nvSpPr>
-            <p:cNvPr id="24" name="TextBox 18">
-              <a:extLst>
-                <a:ext uri="{FF2B5EF4-FFF2-40B4-BE49-F238E27FC236}">
-                  <a16:creationId xmlns:a16="http://schemas.microsoft.com/office/drawing/2014/main" id="{D8CAC2E8-51FF-0253-B81F-754786307ABD}"/>
-                </a:ext>
-              </a:extLst>
-            </p:cNvPr>
-            <p:cNvSpPr txBox="1"/>
-            <p:nvPr/>
-          </p:nvSpPr>
-          <p:spPr>
-            <a:xfrm>
-              <a:off x="9299448" y="2286000"/>
-              <a:ext cx="2011679" cy="323165"/>
-            </a:xfrm>
-            <a:prstGeom prst="rect">
-              <a:avLst/>
-            </a:prstGeom>
-            <a:noFill/>
-          </p:spPr>
-          <p:txBody>
-            <a:bodyPr wrap="square" lIns="45720" rIns="45720" anchor="t">
-              <a:spAutoFit/>
-            </a:bodyPr>
-            <a:lstStyle/>
-            <a:p>
-              <a:pPr algn="l">
-                <a:defRPr sz="1500" b="1">
-                  <a:solidFill>
-                    <a:srgbClr val="14213D"/>
-                  </a:solidFill>
-                  <a:latin typeface="Aptos"/>
-                </a:defRPr>
-              </a:pPr>
-              <a:r>
-                <a:t>Évolutif</a:t>
-              </a:r>
-            </a:p>
-          </p:txBody>
-        </p:sp>
-        <p:sp>
-          <p:nvSpPr>
-            <p:cNvPr id="25" name="TextBox 19">
-              <a:extLst>
-                <a:ext uri="{FF2B5EF4-FFF2-40B4-BE49-F238E27FC236}">
-                  <a16:creationId xmlns:a16="http://schemas.microsoft.com/office/drawing/2014/main" id="{DCAE86F1-6F8E-B6E7-B16E-1AC35A02BF93}"/>
-                </a:ext>
-              </a:extLst>
-            </p:cNvPr>
-            <p:cNvSpPr txBox="1"/>
-            <p:nvPr/>
-          </p:nvSpPr>
-          <p:spPr>
-            <a:xfrm>
-              <a:off x="9299448" y="2670048"/>
-              <a:ext cx="2011679" cy="276999"/>
-            </a:xfrm>
-            <a:prstGeom prst="rect">
-              <a:avLst/>
-            </a:prstGeom>
-            <a:noFill/>
-          </p:spPr>
-          <p:txBody>
-            <a:bodyPr wrap="square" lIns="45720" rIns="45720" anchor="t">
-              <a:spAutoFit/>
-            </a:bodyPr>
-            <a:lstStyle/>
-            <a:p>
-              <a:pPr algn="l">
-                <a:defRPr sz="1200" b="0">
-                  <a:solidFill>
-                    <a:srgbClr val="5B6770"/>
-                  </a:solidFill>
-                  <a:latin typeface="Aptos"/>
-                </a:defRPr>
-              </a:pPr>
-              <a:r>
-                <a:rPr dirty="0"/>
-                <a:t>AWS · Docker </a:t>
-              </a:r>
-            </a:p>
-          </p:txBody>
-        </p:sp>
-      </p:grpSp>
     </p:spTree>
     <p:extLst>
       <p:ext uri="{BB962C8B-B14F-4D97-AF65-F5344CB8AC3E}">
-        <p14:creationId xmlns:p14="http://schemas.microsoft.com/office/powerpoint/2010/main" val="2682824913"/>
+        <p14:creationId xmlns:p14="http://schemas.microsoft.com/office/powerpoint/2010/main" val="2154699298"/>
       </p:ext>
     </p:extLst>
   </p:cSld>
@@ -13933,7 +12748,7 @@
             <a:pPr rtl="0"/>
             <a:fld id="{ACEC98BE-FCE2-445F-8146-3A7F8CC3881D}" type="datetime1">
               <a:rPr lang="fr-FR" smtClean="0"/>
-              <a:t>28/09/2026</a:t>
+              <a:t>02/10/2026</a:t>
             </a:fld>
             <a:endParaRPr lang="en-US" dirty="0"/>
           </a:p>
@@ -14052,7 +12867,7 @@
             <p:ph idx="1"/>
             <p:extLst>
               <p:ext uri="{D42A27DB-BD31-4B8C-83A1-F6EECF244321}">
-                <p14:modId xmlns:p14="http://schemas.microsoft.com/office/powerpoint/2010/main" val="3444525437"/>
+                <p14:modId xmlns:p14="http://schemas.microsoft.com/office/powerpoint/2010/main" val="3769296674"/>
               </p:ext>
             </p:extLst>
           </p:nvPr>
@@ -14096,7 +12911,7 @@
             <a:pPr rtl="0"/>
             <a:fld id="{22897033-9A55-4DAC-991D-1FF1921C78B7}" type="datetime1">
               <a:rPr lang="fr-FR" smtClean="0"/>
-              <a:t>28/09/2026</a:t>
+              <a:t>02/10/2026</a:t>
             </a:fld>
             <a:endParaRPr lang="en-US" dirty="0"/>
           </a:p>
@@ -14219,7 +13034,7 @@
             <a:pPr rtl="0"/>
             <a:fld id="{22897033-9A55-4DAC-991D-1FF1921C78B7}" type="datetime1">
               <a:rPr lang="fr-FR" smtClean="0"/>
-              <a:t>28/09/2026</a:t>
+              <a:t>02/10/2026</a:t>
             </a:fld>
             <a:endParaRPr lang="en-US" dirty="0"/>
           </a:p>
@@ -14321,7 +13136,7 @@
             <a:fld id="{22897033-9A55-4DAC-991D-1FF1921C78B7}" type="datetime1">
               <a:rPr lang="fr-FR" smtClean="0"/>
               <a:pPr/>
-              <a:t>28/09/2026</a:t>
+              <a:t>02/10/2026</a:t>
             </a:fld>
             <a:endParaRPr lang="en-US" dirty="0"/>
           </a:p>
@@ -14330,6 +13145,7 @@
       <p:pic>
         <p:nvPicPr>
           <p:cNvPr id="7" name="Image 6">
+            <a:hlinkClick r:id="rId2"/>
             <a:extLst>
               <a:ext uri="{FF2B5EF4-FFF2-40B4-BE49-F238E27FC236}">
                 <a16:creationId xmlns:a16="http://schemas.microsoft.com/office/drawing/2014/main" id="{A140C5AC-CA73-578E-21B8-C33041950616}"/>
@@ -14342,7 +13158,7 @@
           <p:nvPr/>
         </p:nvPicPr>
         <p:blipFill>
-          <a:blip r:embed="rId2">
+          <a:blip r:embed="rId3">
             <a:extLst>
               <a:ext uri="{28A0092B-C50C-407E-A947-70E740481C1C}">
                 <a14:useLocalDpi xmlns:a14="http://schemas.microsoft.com/office/drawing/2010/main" val="0"/>
@@ -14363,69 +13179,6 @@
           </a:prstGeom>
         </p:spPr>
       </p:pic>
-      <p:graphicFrame>
-        <p:nvGraphicFramePr>
-          <p:cNvPr id="8" name="Objet 7">
-            <a:extLst>
-              <a:ext uri="{FF2B5EF4-FFF2-40B4-BE49-F238E27FC236}">
-                <a16:creationId xmlns:a16="http://schemas.microsoft.com/office/drawing/2014/main" id="{35519742-7CE8-AFC8-86FD-6071CD091710}"/>
-              </a:ext>
-            </a:extLst>
-          </p:cNvPr>
-          <p:cNvGraphicFramePr>
-            <a:graphicFrameLocks noChangeAspect="1"/>
-          </p:cNvGraphicFramePr>
-          <p:nvPr>
-            <p:extLst>
-              <p:ext uri="{D42A27DB-BD31-4B8C-83A1-F6EECF244321}">
-                <p14:modId xmlns:p14="http://schemas.microsoft.com/office/powerpoint/2010/main" val="3380400396"/>
-              </p:ext>
-            </p:extLst>
-          </p:nvPr>
-        </p:nvGraphicFramePr>
-        <p:xfrm>
-          <a:off x="4556125" y="3265115"/>
-          <a:ext cx="1539875" cy="517525"/>
-        </p:xfrm>
-        <a:graphic>
-          <a:graphicData uri="http://schemas.openxmlformats.org/presentationml/2006/ole">
-            <mc:AlternateContent xmlns:mc="http://schemas.openxmlformats.org/markup-compatibility/2006">
-              <mc:Choice xmlns:v="urn:schemas-microsoft-com:vml" Requires="v">
-                <p:oleObj name="Objet d’environnement du Gestionnaire de liaisons" showAsIcon="1" r:id="rId3" imgW="1539169" imgH="517956" progId="Package">
-                  <p:embed/>
-                </p:oleObj>
-              </mc:Choice>
-              <mc:Fallback>
-                <p:oleObj name="Objet d’environnement du Gestionnaire de liaisons" showAsIcon="1" r:id="rId3" imgW="1539169" imgH="517956" progId="Package">
-                  <p:embed/>
-                  <p:pic>
-                    <p:nvPicPr>
-                      <p:cNvPr id="0" name=""/>
-                      <p:cNvPicPr/>
-                      <p:nvPr/>
-                    </p:nvPicPr>
-                    <p:blipFill>
-                      <a:blip r:embed="rId4"/>
-                      <a:stretch>
-                        <a:fillRect/>
-                      </a:stretch>
-                    </p:blipFill>
-                    <p:spPr>
-                      <a:xfrm>
-                        <a:off x="4556125" y="3265115"/>
-                        <a:ext cx="1539875" cy="517525"/>
-                      </a:xfrm>
-                      <a:prstGeom prst="rect">
-                        <a:avLst/>
-                      </a:prstGeom>
-                    </p:spPr>
-                  </p:pic>
-                </p:oleObj>
-              </mc:Fallback>
-            </mc:AlternateContent>
-          </a:graphicData>
-        </a:graphic>
-      </p:graphicFrame>
     </p:spTree>
     <p:extLst>
       <p:ext uri="{BB962C8B-B14F-4D97-AF65-F5344CB8AC3E}">
@@ -14528,7 +13281,7 @@
             <a:fld id="{22897033-9A55-4DAC-991D-1FF1921C78B7}" type="datetime1">
               <a:rPr lang="fr-FR" smtClean="0"/>
               <a:pPr/>
-              <a:t>28/09/2026</a:t>
+              <a:t>02/10/2026</a:t>
             </a:fld>
             <a:endParaRPr lang="en-US" dirty="0"/>
           </a:p>
@@ -14766,7 +13519,7 @@
             <a:fld id="{22897033-9A55-4DAC-991D-1FF1921C78B7}" type="datetime1">
               <a:rPr lang="fr-FR" smtClean="0"/>
               <a:pPr/>
-              <a:t>28/09/2026</a:t>
+              <a:t>02/10/2026</a:t>
             </a:fld>
             <a:endParaRPr lang="en-US" dirty="0"/>
           </a:p>
@@ -15004,7 +13757,7 @@
             <a:fld id="{22897033-9A55-4DAC-991D-1FF1921C78B7}" type="datetime1">
               <a:rPr lang="fr-FR" smtClean="0"/>
               <a:pPr/>
-              <a:t>28/09/2026</a:t>
+              <a:t>02/10/2026</a:t>
             </a:fld>
             <a:endParaRPr lang="en-US" dirty="0"/>
           </a:p>
@@ -15331,6 +14084,151 @@
           </a:p>
         </p:txBody>
       </p:sp>
+      <p:sp>
+        <p:nvSpPr>
+          <p:cNvPr id="3" name="ZoneTexte 2">
+            <a:extLst>
+              <a:ext uri="{FF2B5EF4-FFF2-40B4-BE49-F238E27FC236}">
+                <a16:creationId xmlns:a16="http://schemas.microsoft.com/office/drawing/2014/main" id="{81D8AB8C-7E9A-8839-48C3-B8E3A6A7EF7D}"/>
+              </a:ext>
+            </a:extLst>
+          </p:cNvPr>
+          <p:cNvSpPr txBox="1"/>
+          <p:nvPr/>
+        </p:nvSpPr>
+        <p:spPr>
+          <a:xfrm>
+            <a:off x="8805334" y="2060249"/>
+            <a:ext cx="3234266" cy="523220"/>
+          </a:xfrm>
+          <a:prstGeom prst="rect">
+            <a:avLst/>
+          </a:prstGeom>
+          <a:noFill/>
+        </p:spPr>
+        <p:txBody>
+          <a:bodyPr wrap="square" rtlCol="0">
+            <a:spAutoFit/>
+          </a:bodyPr>
+          <a:lstStyle/>
+          <a:p>
+            <a:r>
+              <a:rPr lang="fr-FR" sz="1400" i="1" dirty="0"/>
+              <a:t>Permet l'exécution automatique du workflow tous les 15 du mois à 9h</a:t>
+            </a:r>
+          </a:p>
+        </p:txBody>
+      </p:sp>
+      <p:sp>
+        <p:nvSpPr>
+          <p:cNvPr id="4" name="ZoneTexte 3">
+            <a:extLst>
+              <a:ext uri="{FF2B5EF4-FFF2-40B4-BE49-F238E27FC236}">
+                <a16:creationId xmlns:a16="http://schemas.microsoft.com/office/drawing/2014/main" id="{01245A31-5FE6-3BCF-F7E3-20A2F7B9828C}"/>
+              </a:ext>
+            </a:extLst>
+          </p:cNvPr>
+          <p:cNvSpPr txBox="1"/>
+          <p:nvPr/>
+        </p:nvSpPr>
+        <p:spPr>
+          <a:xfrm>
+            <a:off x="8805334" y="3789662"/>
+            <a:ext cx="3234266" cy="1169551"/>
+          </a:xfrm>
+          <a:prstGeom prst="rect">
+            <a:avLst/>
+          </a:prstGeom>
+          <a:noFill/>
+        </p:spPr>
+        <p:txBody>
+          <a:bodyPr wrap="square" rtlCol="0">
+            <a:spAutoFit/>
+          </a:bodyPr>
+          <a:lstStyle/>
+          <a:p>
+            <a:r>
+              <a:rPr lang="fr-FR" sz="1400" i="1" dirty="0"/>
+              <a:t>Trois fichiers Excel sont téléchargés depuis GitHub : les données ERP (Fichier_erp.xlsx), un fichier de liaison entre systèmes (fichier_liaison.xlsx) et les données web (Fichier_web.xlsx).</a:t>
+            </a:r>
+          </a:p>
+        </p:txBody>
+      </p:sp>
+      <p:sp>
+        <p:nvSpPr>
+          <p:cNvPr id="6" name="ZoneTexte 5">
+            <a:extLst>
+              <a:ext uri="{FF2B5EF4-FFF2-40B4-BE49-F238E27FC236}">
+                <a16:creationId xmlns:a16="http://schemas.microsoft.com/office/drawing/2014/main" id="{5DA5C7A5-0573-38BC-A100-A0871A5D68D7}"/>
+              </a:ext>
+            </a:extLst>
+          </p:cNvPr>
+          <p:cNvSpPr txBox="1"/>
+          <p:nvPr/>
+        </p:nvSpPr>
+        <p:spPr>
+          <a:xfrm>
+            <a:off x="8805334" y="5580630"/>
+            <a:ext cx="3234266" cy="1169551"/>
+          </a:xfrm>
+          <a:prstGeom prst="rect">
+            <a:avLst/>
+          </a:prstGeom>
+          <a:noFill/>
+        </p:spPr>
+        <p:txBody>
+          <a:bodyPr wrap="square" rtlCol="0">
+            <a:spAutoFit/>
+          </a:bodyPr>
+          <a:lstStyle/>
+          <a:p>
+            <a:r>
+              <a:rPr lang="fr-FR" sz="1400" i="1" dirty="0"/>
+              <a:t>Un script Python charge ces trois fichiers dans une base </a:t>
+            </a:r>
+            <a:r>
+              <a:rPr lang="fr-FR" sz="1400" i="1" dirty="0" err="1"/>
+              <a:t>DuckDB</a:t>
+            </a:r>
+            <a:r>
+              <a:rPr lang="fr-FR" sz="1400" i="1" dirty="0"/>
+              <a:t> (</a:t>
+            </a:r>
+            <a:r>
+              <a:rPr lang="fr-FR" sz="1400" i="1" dirty="0" err="1"/>
+              <a:t>bottleneck.db</a:t>
+            </a:r>
+            <a:r>
+              <a:rPr lang="fr-FR" sz="1400" i="1" dirty="0"/>
+              <a:t>), créant les tables </a:t>
+            </a:r>
+            <a:r>
+              <a:rPr lang="fr-FR" sz="1400" i="1" dirty="0" err="1"/>
+              <a:t>erp_export_data</a:t>
+            </a:r>
+            <a:r>
+              <a:rPr lang="fr-FR" sz="1400" i="1" dirty="0"/>
+              <a:t>, </a:t>
+            </a:r>
+            <a:r>
+              <a:rPr lang="fr-FR" sz="1400" i="1" dirty="0" err="1"/>
+              <a:t>web_export_data</a:t>
+            </a:r>
+            <a:r>
+              <a:rPr lang="fr-FR" sz="1400" i="1" dirty="0"/>
+              <a:t> et </a:t>
+            </a:r>
+            <a:r>
+              <a:rPr lang="fr-FR" sz="1400" i="1" dirty="0" err="1"/>
+              <a:t>liaison_export_data</a:t>
+            </a:r>
+            <a:r>
+              <a:rPr lang="fr-FR" sz="1400" i="1" dirty="0"/>
+              <a:t>. </a:t>
+            </a:r>
+          </a:p>
+        </p:txBody>
+      </p:sp>
     </p:spTree>
     <p:extLst>
       <p:ext uri="{BB962C8B-B14F-4D97-AF65-F5344CB8AC3E}">
@@ -15528,6 +14426,95 @@
           </a:ln>
         </p:spPr>
       </p:pic>
+      <p:sp>
+        <p:nvSpPr>
+          <p:cNvPr id="5" name="ZoneTexte 4">
+            <a:extLst>
+              <a:ext uri="{FF2B5EF4-FFF2-40B4-BE49-F238E27FC236}">
+                <a16:creationId xmlns:a16="http://schemas.microsoft.com/office/drawing/2014/main" id="{5A964B1F-601E-AEFA-FB05-F8FC563A1B27}"/>
+              </a:ext>
+            </a:extLst>
+          </p:cNvPr>
+          <p:cNvSpPr txBox="1"/>
+          <p:nvPr/>
+        </p:nvSpPr>
+        <p:spPr>
+          <a:xfrm>
+            <a:off x="8859895" y="1643138"/>
+            <a:ext cx="3175000" cy="4185761"/>
+          </a:xfrm>
+          <a:prstGeom prst="rect">
+            <a:avLst/>
+          </a:prstGeom>
+          <a:noFill/>
+        </p:spPr>
+        <p:txBody>
+          <a:bodyPr wrap="square">
+            <a:spAutoFit/>
+          </a:bodyPr>
+          <a:lstStyle/>
+          <a:p>
+            <a:r>
+              <a:rPr lang="fr-FR" sz="1400" i="1" dirty="0"/>
+              <a:t>Boucle qui sert à:</a:t>
+            </a:r>
+          </a:p>
+          <a:p>
+            <a:endParaRPr lang="fr-FR" sz="1400" i="1" dirty="0"/>
+          </a:p>
+          <a:p>
+            <a:pPr marL="285750" indent="-285750">
+              <a:buFont typeface="Arial" panose="020B0604020202020204" pitchFamily="34" charset="0"/>
+              <a:buChar char="•"/>
+            </a:pPr>
+            <a:r>
+              <a:rPr lang="fr-FR" sz="1400" i="1" dirty="0"/>
+              <a:t>exécuter le script Python de nettoyage générique : suppression des colonnes/lignes vides, dédoublonnage, conversion de formats.</a:t>
+            </a:r>
+          </a:p>
+          <a:p>
+            <a:endParaRPr lang="fr-FR" sz="1400" i="1" dirty="0"/>
+          </a:p>
+          <a:p>
+            <a:pPr marL="285750" indent="-285750">
+              <a:buFont typeface="Arial" panose="020B0604020202020204" pitchFamily="34" charset="0"/>
+              <a:buChar char="•"/>
+            </a:pPr>
+            <a:r>
+              <a:rPr lang="fr-FR" sz="1400" i="1" dirty="0"/>
+              <a:t>lancer des tests </a:t>
+            </a:r>
+            <a:r>
+              <a:rPr lang="fr-FR" sz="1400" i="1" dirty="0" err="1"/>
+              <a:t>pytest</a:t>
+            </a:r>
+            <a:r>
+              <a:rPr lang="fr-FR" sz="1400" i="1" dirty="0"/>
+              <a:t> : absence de colonnes nulles, absence de lignes nulles, absence de lignes en doublons, vérification de conversion de formats de données (dates au format DATE, prix au format NUMERIQUE…)</a:t>
+            </a:r>
+          </a:p>
+          <a:p>
+            <a:pPr marL="285750" indent="-285750">
+              <a:buFontTx/>
+              <a:buChar char="-"/>
+            </a:pPr>
+            <a:endParaRPr lang="fr-FR" sz="1400" i="1" dirty="0"/>
+          </a:p>
+          <a:p>
+            <a:pPr marL="285750" indent="-285750">
+              <a:buFont typeface="Arial" panose="020B0604020202020204" pitchFamily="34" charset="0"/>
+              <a:buChar char="•"/>
+            </a:pPr>
+            <a:r>
+              <a:rPr lang="fr-FR" sz="1400" i="1" dirty="0"/>
+              <a:t>si les tests échouent, le flow est mis en pause.</a:t>
+            </a:r>
+          </a:p>
+          <a:p>
+            <a:endParaRPr lang="fr-FR" sz="1400" i="1" dirty="0"/>
+          </a:p>
+        </p:txBody>
+      </p:sp>
     </p:spTree>
     <p:extLst>
       <p:ext uri="{BB962C8B-B14F-4D97-AF65-F5344CB8AC3E}">

--- a/ulesie_sebastien_2_presentation_092026.pptx
+++ b/ulesie_sebastien_2_presentation_092026.pptx
@@ -2430,12 +2430,8 @@
         <a:p>
           <a:pPr algn="l"/>
           <a:r>
-            <a:rPr lang="fr-FR" b="1" dirty="0" err="1"/>
-            <a:t>Atomatiser</a:t>
-          </a:r>
-          <a:r>
             <a:rPr lang="fr-FR" b="1" dirty="0"/>
-            <a:t> cette chaîne de traitement et d’analyse de données</a:t>
+            <a:t>Automatiser cette chaîne de traitement et d’analyse de données</a:t>
           </a:r>
         </a:p>
       </dgm:t>
@@ -3352,12 +3348,8 @@
             <a:buNone/>
           </a:pPr>
           <a:r>
-            <a:rPr lang="fr-FR" sz="2300" b="1" kern="1200" dirty="0" err="1"/>
-            <a:t>Atomatiser</a:t>
-          </a:r>
-          <a:r>
             <a:rPr lang="fr-FR" sz="2300" b="1" kern="1200" dirty="0"/>
-            <a:t> cette chaîne de traitement et d’analyse de données</a:t>
+            <a:t>Automatiser cette chaîne de traitement et d’analyse de données</a:t>
           </a:r>
         </a:p>
       </dsp:txBody>
@@ -6125,7 +6117,7 @@
             <a:pPr rtl="0"/>
             <a:fld id="{2FC74BDE-6627-49B6-90F1-0334E723F64C}" type="datetime1">
               <a:rPr lang="fr-FR" smtClean="0"/>
-              <a:t>02/10/2026</a:t>
+              <a:t>03/10/2026</a:t>
             </a:fld>
             <a:endParaRPr lang="en-US" dirty="0"/>
           </a:p>
@@ -6295,7 +6287,7 @@
             <a:pPr rtl="0"/>
             <a:fld id="{F28DAF60-E56A-4648-8936-22D801672B6C}" type="datetime1">
               <a:rPr lang="fr-FR" smtClean="0"/>
-              <a:t>02/10/2026</a:t>
+              <a:t>03/10/2026</a:t>
             </a:fld>
             <a:endParaRPr lang="en-US"/>
           </a:p>
@@ -6816,7 +6808,7 @@
             <a:pPr rtl="0"/>
             <a:fld id="{E641DF6C-ECED-4BD8-8025-73323DD5D35C}" type="datetime1">
               <a:rPr lang="fr-FR" smtClean="0"/>
-              <a:t>02/10/2026</a:t>
+              <a:t>03/10/2026</a:t>
             </a:fld>
             <a:endParaRPr lang="en-US" dirty="0"/>
           </a:p>
@@ -7023,7 +7015,7 @@
             <a:pPr rtl="0"/>
             <a:fld id="{1E5B03D9-FC89-4784-BD60-336471BA7724}" type="datetime1">
               <a:rPr lang="fr-FR" smtClean="0"/>
-              <a:t>02/10/2026</a:t>
+              <a:t>03/10/2026</a:t>
             </a:fld>
             <a:endParaRPr lang="en-US" dirty="0"/>
           </a:p>
@@ -7417,7 +7409,7 @@
             <a:pPr rtl="0"/>
             <a:fld id="{D0216CB3-B929-446C-876F-83C9B86D9FDE}" type="datetime1">
               <a:rPr lang="fr-FR" smtClean="0"/>
-              <a:t>02/10/2026</a:t>
+              <a:t>03/10/2026</a:t>
             </a:fld>
             <a:endParaRPr lang="en-US" dirty="0"/>
           </a:p>
@@ -7619,7 +7611,7 @@
             <a:pPr rtl="0"/>
             <a:fld id="{22897033-9A55-4DAC-991D-1FF1921C78B7}" type="datetime1">
               <a:rPr lang="fr-FR" smtClean="0"/>
-              <a:t>02/10/2026</a:t>
+              <a:t>03/10/2026</a:t>
             </a:fld>
             <a:endParaRPr lang="en-US" dirty="0"/>
           </a:p>
@@ -7942,7 +7934,7 @@
             <a:pPr rtl="0"/>
             <a:fld id="{A1255F31-5DB3-4925-BA87-822F5B17A2F1}" type="datetime1">
               <a:rPr lang="fr-FR" smtClean="0"/>
-              <a:t>02/10/2026</a:t>
+              <a:t>03/10/2026</a:t>
             </a:fld>
             <a:endParaRPr lang="en-US" dirty="0"/>
           </a:p>
@@ -8199,7 +8191,7 @@
             <a:pPr rtl="0"/>
             <a:fld id="{7E4EF44C-5F50-4A80-A957-57B3338337C0}" type="datetime1">
               <a:rPr lang="fr-FR" smtClean="0"/>
-              <a:t>02/10/2026</a:t>
+              <a:t>03/10/2026</a:t>
             </a:fld>
             <a:endParaRPr lang="en-US" dirty="0"/>
           </a:p>
@@ -8625,7 +8617,7 @@
             <a:pPr rtl="0"/>
             <a:fld id="{B2D0F46D-59FD-4484-924E-E79DD516B5ED}" type="datetime1">
               <a:rPr lang="fr-FR" smtClean="0"/>
-              <a:t>02/10/2026</a:t>
+              <a:t>03/10/2026</a:t>
             </a:fld>
             <a:endParaRPr lang="en-US" dirty="0"/>
           </a:p>
@@ -8752,7 +8744,7 @@
             <a:pPr rtl="0"/>
             <a:fld id="{0FAEC910-4AAA-42A1-A49C-7DDC64BC53C6}" type="datetime1">
               <a:rPr lang="fr-FR" smtClean="0"/>
-              <a:t>02/10/2026</a:t>
+              <a:t>03/10/2026</a:t>
             </a:fld>
             <a:endParaRPr lang="en-US" dirty="0"/>
           </a:p>
@@ -8850,7 +8842,7 @@
             <a:pPr rtl="0"/>
             <a:fld id="{ACEC98BE-FCE2-445F-8146-3A7F8CC3881D}" type="datetime1">
               <a:rPr lang="fr-FR" smtClean="0"/>
-              <a:t>02/10/2026</a:t>
+              <a:t>03/10/2026</a:t>
             </a:fld>
             <a:endParaRPr lang="en-US" dirty="0"/>
           </a:p>
@@ -9238,7 +9230,7 @@
             <a:pPr rtl="0"/>
             <a:fld id="{6D0953DD-A6BD-427D-B7A8-BDE378B2E678}" type="datetime1">
               <a:rPr lang="fr-FR" smtClean="0"/>
-              <a:t>02/10/2026</a:t>
+              <a:t>03/10/2026</a:t>
             </a:fld>
             <a:endParaRPr lang="en-US" dirty="0"/>
           </a:p>
@@ -9536,7 +9528,7 @@
             <a:pPr rtl="0"/>
             <a:fld id="{47E77B56-6788-4F40-A65E-12AFEB3AC095}" type="datetime1">
               <a:rPr lang="fr-FR" smtClean="0"/>
-              <a:t>02/10/2026</a:t>
+              <a:t>03/10/2026</a:t>
             </a:fld>
             <a:endParaRPr lang="en-US" dirty="0"/>
           </a:p>
@@ -9754,7 +9746,7 @@
             <a:pPr rtl="0"/>
             <a:fld id="{E69A0D1A-B1A6-4A33-B3AE-513EF3B4A7E7}" type="datetime1">
               <a:rPr lang="fr-FR" smtClean="0"/>
-              <a:t>02/10/2026</a:t>
+              <a:t>03/10/2026</a:t>
             </a:fld>
             <a:endParaRPr lang="en-US" dirty="0"/>
           </a:p>
@@ -12678,7 +12670,7 @@
             <a:pPr rtl="0"/>
             <a:fld id="{22897033-9A55-4DAC-991D-1FF1921C78B7}" type="datetime1">
               <a:rPr lang="fr-FR" smtClean="0"/>
-              <a:t>02/10/2026</a:t>
+              <a:t>03/10/2026</a:t>
             </a:fld>
             <a:endParaRPr lang="en-US" dirty="0"/>
           </a:p>
@@ -12748,7 +12740,7 @@
             <a:pPr rtl="0"/>
             <a:fld id="{ACEC98BE-FCE2-445F-8146-3A7F8CC3881D}" type="datetime1">
               <a:rPr lang="fr-FR" smtClean="0"/>
-              <a:t>02/10/2026</a:t>
+              <a:t>03/10/2026</a:t>
             </a:fld>
             <a:endParaRPr lang="en-US" dirty="0"/>
           </a:p>
@@ -12911,7 +12903,7 @@
             <a:pPr rtl="0"/>
             <a:fld id="{22897033-9A55-4DAC-991D-1FF1921C78B7}" type="datetime1">
               <a:rPr lang="fr-FR" smtClean="0"/>
-              <a:t>02/10/2026</a:t>
+              <a:t>03/10/2026</a:t>
             </a:fld>
             <a:endParaRPr lang="en-US" dirty="0"/>
           </a:p>
@@ -12963,7 +12955,7 @@
             <p:ph idx="1"/>
             <p:extLst>
               <p:ext uri="{D42A27DB-BD31-4B8C-83A1-F6EECF244321}">
-                <p14:modId xmlns:p14="http://schemas.microsoft.com/office/powerpoint/2010/main" val="3789862955"/>
+                <p14:modId xmlns:p14="http://schemas.microsoft.com/office/powerpoint/2010/main" val="2047388892"/>
               </p:ext>
             </p:extLst>
           </p:nvPr>
@@ -13034,7 +13026,7 @@
             <a:pPr rtl="0"/>
             <a:fld id="{22897033-9A55-4DAC-991D-1FF1921C78B7}" type="datetime1">
               <a:rPr lang="fr-FR" smtClean="0"/>
-              <a:t>02/10/2026</a:t>
+              <a:t>03/10/2026</a:t>
             </a:fld>
             <a:endParaRPr lang="en-US" dirty="0"/>
           </a:p>
@@ -13136,7 +13128,7 @@
             <a:fld id="{22897033-9A55-4DAC-991D-1FF1921C78B7}" type="datetime1">
               <a:rPr lang="fr-FR" smtClean="0"/>
               <a:pPr/>
-              <a:t>02/10/2026</a:t>
+              <a:t>03/10/2026</a:t>
             </a:fld>
             <a:endParaRPr lang="en-US" dirty="0"/>
           </a:p>
@@ -13281,7 +13273,7 @@
             <a:fld id="{22897033-9A55-4DAC-991D-1FF1921C78B7}" type="datetime1">
               <a:rPr lang="fr-FR" smtClean="0"/>
               <a:pPr/>
-              <a:t>02/10/2026</a:t>
+              <a:t>03/10/2026</a:t>
             </a:fld>
             <a:endParaRPr lang="en-US" dirty="0"/>
           </a:p>
@@ -13519,7 +13511,7 @@
             <a:fld id="{22897033-9A55-4DAC-991D-1FF1921C78B7}" type="datetime1">
               <a:rPr lang="fr-FR" smtClean="0"/>
               <a:pPr/>
-              <a:t>02/10/2026</a:t>
+              <a:t>03/10/2026</a:t>
             </a:fld>
             <a:endParaRPr lang="en-US" dirty="0"/>
           </a:p>
@@ -13757,7 +13749,7 @@
             <a:fld id="{22897033-9A55-4DAC-991D-1FF1921C78B7}" type="datetime1">
               <a:rPr lang="fr-FR" smtClean="0"/>
               <a:pPr/>
-              <a:t>02/10/2026</a:t>
+              <a:t>03/10/2026</a:t>
             </a:fld>
             <a:endParaRPr lang="en-US" dirty="0"/>
           </a:p>

--- a/ulesie_sebastien_2_presentation_092026.pptx
+++ b/ulesie_sebastien_2_presentation_092026.pptx
@@ -6117,7 +6117,7 @@
             <a:pPr rtl="0"/>
             <a:fld id="{2FC74BDE-6627-49B6-90F1-0334E723F64C}" type="datetime1">
               <a:rPr lang="fr-FR" smtClean="0"/>
-              <a:t>03/10/2026</a:t>
+              <a:t>08/10/2026</a:t>
             </a:fld>
             <a:endParaRPr lang="en-US" dirty="0"/>
           </a:p>
@@ -6287,7 +6287,7 @@
             <a:pPr rtl="0"/>
             <a:fld id="{F28DAF60-E56A-4648-8936-22D801672B6C}" type="datetime1">
               <a:rPr lang="fr-FR" smtClean="0"/>
-              <a:t>03/10/2026</a:t>
+              <a:t>08/10/2026</a:t>
             </a:fld>
             <a:endParaRPr lang="en-US"/>
           </a:p>
@@ -6808,7 +6808,7 @@
             <a:pPr rtl="0"/>
             <a:fld id="{E641DF6C-ECED-4BD8-8025-73323DD5D35C}" type="datetime1">
               <a:rPr lang="fr-FR" smtClean="0"/>
-              <a:t>03/10/2026</a:t>
+              <a:t>08/10/2026</a:t>
             </a:fld>
             <a:endParaRPr lang="en-US" dirty="0"/>
           </a:p>
@@ -7015,7 +7015,7 @@
             <a:pPr rtl="0"/>
             <a:fld id="{1E5B03D9-FC89-4784-BD60-336471BA7724}" type="datetime1">
               <a:rPr lang="fr-FR" smtClean="0"/>
-              <a:t>03/10/2026</a:t>
+              <a:t>08/10/2026</a:t>
             </a:fld>
             <a:endParaRPr lang="en-US" dirty="0"/>
           </a:p>
@@ -7409,7 +7409,7 @@
             <a:pPr rtl="0"/>
             <a:fld id="{D0216CB3-B929-446C-876F-83C9B86D9FDE}" type="datetime1">
               <a:rPr lang="fr-FR" smtClean="0"/>
-              <a:t>03/10/2026</a:t>
+              <a:t>08/10/2026</a:t>
             </a:fld>
             <a:endParaRPr lang="en-US" dirty="0"/>
           </a:p>
@@ -7611,7 +7611,7 @@
             <a:pPr rtl="0"/>
             <a:fld id="{22897033-9A55-4DAC-991D-1FF1921C78B7}" type="datetime1">
               <a:rPr lang="fr-FR" smtClean="0"/>
-              <a:t>03/10/2026</a:t>
+              <a:t>08/10/2026</a:t>
             </a:fld>
             <a:endParaRPr lang="en-US" dirty="0"/>
           </a:p>
@@ -7934,7 +7934,7 @@
             <a:pPr rtl="0"/>
             <a:fld id="{A1255F31-5DB3-4925-BA87-822F5B17A2F1}" type="datetime1">
               <a:rPr lang="fr-FR" smtClean="0"/>
-              <a:t>03/10/2026</a:t>
+              <a:t>08/10/2026</a:t>
             </a:fld>
             <a:endParaRPr lang="en-US" dirty="0"/>
           </a:p>
@@ -8191,7 +8191,7 @@
             <a:pPr rtl="0"/>
             <a:fld id="{7E4EF44C-5F50-4A80-A957-57B3338337C0}" type="datetime1">
               <a:rPr lang="fr-FR" smtClean="0"/>
-              <a:t>03/10/2026</a:t>
+              <a:t>08/10/2026</a:t>
             </a:fld>
             <a:endParaRPr lang="en-US" dirty="0"/>
           </a:p>
@@ -8617,7 +8617,7 @@
             <a:pPr rtl="0"/>
             <a:fld id="{B2D0F46D-59FD-4484-924E-E79DD516B5ED}" type="datetime1">
               <a:rPr lang="fr-FR" smtClean="0"/>
-              <a:t>03/10/2026</a:t>
+              <a:t>08/10/2026</a:t>
             </a:fld>
             <a:endParaRPr lang="en-US" dirty="0"/>
           </a:p>
@@ -8744,7 +8744,7 @@
             <a:pPr rtl="0"/>
             <a:fld id="{0FAEC910-4AAA-42A1-A49C-7DDC64BC53C6}" type="datetime1">
               <a:rPr lang="fr-FR" smtClean="0"/>
-              <a:t>03/10/2026</a:t>
+              <a:t>08/10/2026</a:t>
             </a:fld>
             <a:endParaRPr lang="en-US" dirty="0"/>
           </a:p>
@@ -8842,7 +8842,7 @@
             <a:pPr rtl="0"/>
             <a:fld id="{ACEC98BE-FCE2-445F-8146-3A7F8CC3881D}" type="datetime1">
               <a:rPr lang="fr-FR" smtClean="0"/>
-              <a:t>03/10/2026</a:t>
+              <a:t>08/10/2026</a:t>
             </a:fld>
             <a:endParaRPr lang="en-US" dirty="0"/>
           </a:p>
@@ -9230,7 +9230,7 @@
             <a:pPr rtl="0"/>
             <a:fld id="{6D0953DD-A6BD-427D-B7A8-BDE378B2E678}" type="datetime1">
               <a:rPr lang="fr-FR" smtClean="0"/>
-              <a:t>03/10/2026</a:t>
+              <a:t>08/10/2026</a:t>
             </a:fld>
             <a:endParaRPr lang="en-US" dirty="0"/>
           </a:p>
@@ -9528,7 +9528,7 @@
             <a:pPr rtl="0"/>
             <a:fld id="{47E77B56-6788-4F40-A65E-12AFEB3AC095}" type="datetime1">
               <a:rPr lang="fr-FR" smtClean="0"/>
-              <a:t>03/10/2026</a:t>
+              <a:t>08/10/2026</a:t>
             </a:fld>
             <a:endParaRPr lang="en-US" dirty="0"/>
           </a:p>
@@ -9746,7 +9746,7 @@
             <a:pPr rtl="0"/>
             <a:fld id="{E69A0D1A-B1A6-4A33-B3AE-513EF3B4A7E7}" type="datetime1">
               <a:rPr lang="fr-FR" smtClean="0"/>
-              <a:t>03/10/2026</a:t>
+              <a:t>08/10/2026</a:t>
             </a:fld>
             <a:endParaRPr lang="en-US" dirty="0"/>
           </a:p>
@@ -12670,7 +12670,7 @@
             <a:pPr rtl="0"/>
             <a:fld id="{22897033-9A55-4DAC-991D-1FF1921C78B7}" type="datetime1">
               <a:rPr lang="fr-FR" smtClean="0"/>
-              <a:t>03/10/2026</a:t>
+              <a:t>08/10/2026</a:t>
             </a:fld>
             <a:endParaRPr lang="en-US" dirty="0"/>
           </a:p>
@@ -12740,7 +12740,7 @@
             <a:pPr rtl="0"/>
             <a:fld id="{ACEC98BE-FCE2-445F-8146-3A7F8CC3881D}" type="datetime1">
               <a:rPr lang="fr-FR" smtClean="0"/>
-              <a:t>03/10/2026</a:t>
+              <a:t>08/10/2026</a:t>
             </a:fld>
             <a:endParaRPr lang="en-US" dirty="0"/>
           </a:p>
@@ -12903,7 +12903,7 @@
             <a:pPr rtl="0"/>
             <a:fld id="{22897033-9A55-4DAC-991D-1FF1921C78B7}" type="datetime1">
               <a:rPr lang="fr-FR" smtClean="0"/>
-              <a:t>03/10/2026</a:t>
+              <a:t>08/10/2026</a:t>
             </a:fld>
             <a:endParaRPr lang="en-US" dirty="0"/>
           </a:p>
@@ -13026,7 +13026,7 @@
             <a:pPr rtl="0"/>
             <a:fld id="{22897033-9A55-4DAC-991D-1FF1921C78B7}" type="datetime1">
               <a:rPr lang="fr-FR" smtClean="0"/>
-              <a:t>03/10/2026</a:t>
+              <a:t>08/10/2026</a:t>
             </a:fld>
             <a:endParaRPr lang="en-US" dirty="0"/>
           </a:p>
@@ -13128,7 +13128,7 @@
             <a:fld id="{22897033-9A55-4DAC-991D-1FF1921C78B7}" type="datetime1">
               <a:rPr lang="fr-FR" smtClean="0"/>
               <a:pPr/>
-              <a:t>03/10/2026</a:t>
+              <a:t>08/10/2026</a:t>
             </a:fld>
             <a:endParaRPr lang="en-US" dirty="0"/>
           </a:p>
@@ -13273,7 +13273,7 @@
             <a:fld id="{22897033-9A55-4DAC-991D-1FF1921C78B7}" type="datetime1">
               <a:rPr lang="fr-FR" smtClean="0"/>
               <a:pPr/>
-              <a:t>03/10/2026</a:t>
+              <a:t>08/10/2026</a:t>
             </a:fld>
             <a:endParaRPr lang="en-US" dirty="0"/>
           </a:p>
@@ -13511,7 +13511,7 @@
             <a:fld id="{22897033-9A55-4DAC-991D-1FF1921C78B7}" type="datetime1">
               <a:rPr lang="fr-FR" smtClean="0"/>
               <a:pPr/>
-              <a:t>03/10/2026</a:t>
+              <a:t>08/10/2026</a:t>
             </a:fld>
             <a:endParaRPr lang="en-US" dirty="0"/>
           </a:p>
@@ -13749,7 +13749,7 @@
             <a:fld id="{22897033-9A55-4DAC-991D-1FF1921C78B7}" type="datetime1">
               <a:rPr lang="fr-FR" smtClean="0"/>
               <a:pPr/>
-              <a:t>03/10/2026</a:t>
+              <a:t>08/10/2026</a:t>
             </a:fld>
             <a:endParaRPr lang="en-US" dirty="0"/>
           </a:p>
@@ -13845,10 +13845,10 @@
       </p:sp>
       <p:pic>
         <p:nvPicPr>
-          <p:cNvPr id="3" name="Image 2">
+          <p:cNvPr id="8" name="Image 7">
             <a:extLst>
               <a:ext uri="{FF2B5EF4-FFF2-40B4-BE49-F238E27FC236}">
-                <a16:creationId xmlns:a16="http://schemas.microsoft.com/office/drawing/2014/main" id="{3AFEC35E-CDE4-BB26-653C-92B6D63BCA38}"/>
+                <a16:creationId xmlns:a16="http://schemas.microsoft.com/office/drawing/2014/main" id="{20642828-987F-282C-E3A4-5D834345AFAD}"/>
               </a:ext>
             </a:extLst>
           </p:cNvPr>
@@ -13858,22 +13858,15 @@
           <p:nvPr/>
         </p:nvPicPr>
         <p:blipFill>
-          <a:blip r:embed="rId2">
-            <a:extLst>
-              <a:ext uri="{28A0092B-C50C-407E-A947-70E740481C1C}">
-                <a14:useLocalDpi xmlns:a14="http://schemas.microsoft.com/office/drawing/2010/main" val="0"/>
-              </a:ext>
-            </a:extLst>
-          </a:blip>
-          <a:srcRect l="18224" t="60985"/>
+          <a:blip r:embed="rId3"/>
           <a:stretch>
             <a:fillRect/>
           </a:stretch>
         </p:blipFill>
         <p:spPr>
           <a:xfrm>
-            <a:off x="4150659" y="691264"/>
-            <a:ext cx="7115853" cy="6097775"/>
+            <a:off x="4655235" y="874895"/>
+            <a:ext cx="7123081" cy="5885207"/>
           </a:xfrm>
           <a:prstGeom prst="rect">
             <a:avLst/>
